--- a/artifacts/external-markdown-visual-eval/iteration-03/build/deck.pptx
+++ b/artifacts/external-markdown-visual-eval/iteration-03/build/deck.pptx
@@ -5148,37 +5148,8 @@
         </p:nvSpPr>
         <p:spPr>
           <a:xfrm>
-            <a:off x="786384" y="1956816"/>
-            <a:ext cx="32004" cy="3483864"/>
-          </a:xfrm>
-          <a:prstGeom prst="rect">
-            <a:avLst/>
-          </a:prstGeom>
-          <a:solidFill>
-            <a:srgbClr val="9E0F62">
-              <a:alpha val="80000"/>
-            </a:srgbClr>
-          </a:solidFill>
-          <a:ln w="12700">
-            <a:solidFill>
-              <a:srgbClr val="9E0F62">
-                <a:alpha val="0"/>
-              </a:srgbClr>
-            </a:solidFill>
-            <a:prstDash val="solid"/>
-          </a:ln>
-        </p:spPr>
-      </p:sp>
-      <p:sp>
-        <p:nvSpPr>
-          <p:cNvPr id="9" name="Shape 7"/>
-          <p:cNvSpPr/>
-          <p:nvPr/>
-        </p:nvSpPr>
-        <p:spPr>
-          <a:xfrm>
-            <a:off x="914400" y="1865376"/>
-            <a:ext cx="73152" cy="1024128"/>
+            <a:off x="822960" y="1554480"/>
+            <a:ext cx="4937760" cy="73152"/>
           </a:xfrm>
           <a:prstGeom prst="rect">
             <a:avLst/>
@@ -5198,41 +5169,14 @@
       </p:sp>
       <p:sp>
         <p:nvSpPr>
-          <p:cNvPr id="10" name="Shape 8"/>
-          <p:cNvSpPr/>
-          <p:nvPr/>
-        </p:nvSpPr>
-        <p:spPr>
-          <a:xfrm>
-            <a:off x="914400" y="3191256"/>
-            <a:ext cx="73152" cy="1024128"/>
-          </a:xfrm>
-          <a:prstGeom prst="rect">
-            <a:avLst/>
-          </a:prstGeom>
-          <a:solidFill>
-            <a:srgbClr val="9E0F62"/>
-          </a:solidFill>
-          <a:ln w="12700">
-            <a:solidFill>
-              <a:srgbClr val="9E0F62">
-                <a:alpha val="0"/>
-              </a:srgbClr>
-            </a:solidFill>
-            <a:prstDash val="solid"/>
-          </a:ln>
-        </p:spPr>
-      </p:sp>
-      <p:sp>
-        <p:nvSpPr>
-          <p:cNvPr id="11" name="Shape 9"/>
-          <p:cNvSpPr/>
-          <p:nvPr/>
-        </p:nvSpPr>
-        <p:spPr>
-          <a:xfrm>
-            <a:off x="914400" y="4507992"/>
-            <a:ext cx="73152" cy="1024128"/>
+          <p:cNvPr id="9" name="Shape 7"/>
+          <p:cNvSpPr/>
+          <p:nvPr/>
+        </p:nvSpPr>
+        <p:spPr>
+          <a:xfrm>
+            <a:off x="6400800" y="1554480"/>
+            <a:ext cx="4937760" cy="73152"/>
           </a:xfrm>
           <a:prstGeom prst="rect">
             <a:avLst/>
@@ -5250,207 +5194,9 @@
           </a:ln>
         </p:spPr>
       </p:sp>
-      <p:pic>
-        <p:nvPicPr>
-          <p:cNvPr id="12" name="Image 0" descr="preencoded.png">    </p:cNvPr>
-          <p:cNvPicPr>
-            <a:picLocks noChangeAspect="1"/>
-          </p:cNvPicPr>
-          <p:nvPr/>
-        </p:nvPicPr>
-        <p:blipFill>
-          <a:blip r:embed="rId1">
-            <a:extLst>
-              <a:ext uri="{96DAC541-7B7A-43D3-8B79-37D633B846F1}">
-                <asvg:svgBlip xmlns:asvg="http://schemas.microsoft.com/office/drawing/2016/SVG/main" r:embed="rId2"/>
-              </a:ext>
-            </a:extLst>
-          </a:blip>
-          <a:stretch>
-            <a:fillRect/>
-          </a:stretch>
-        </p:blipFill>
-        <p:spPr>
-          <a:xfrm>
-            <a:off x="914400" y="1865376"/>
-            <a:ext cx="10241280" cy="1024128"/>
-          </a:xfrm>
-          <a:prstGeom prst="rect">
-            <a:avLst/>
-          </a:prstGeom>
-        </p:spPr>
-      </p:pic>
-      <p:sp>
-        <p:nvSpPr>
-          <p:cNvPr id="13" name="Shape 10"/>
-          <p:cNvSpPr/>
-          <p:nvPr/>
-        </p:nvSpPr>
-        <p:spPr>
-          <a:xfrm>
-            <a:off x="914400" y="1865376"/>
-            <a:ext cx="10241280" cy="1024128"/>
-          </a:xfrm>
-          <a:prstGeom prst="rect">
-            <a:avLst/>
-          </a:prstGeom>
-          <a:solidFill>
-            <a:srgbClr val="FBF8F3">
-              <a:alpha val="0"/>
-            </a:srgbClr>
-          </a:solidFill>
-          <a:ln w="12700">
-            <a:solidFill>
-              <a:srgbClr val="C6CCC9">
-                <a:alpha val="0"/>
-              </a:srgbClr>
-            </a:solidFill>
-            <a:prstDash val="solid"/>
-          </a:ln>
-          <a:effectLst>
-            <a:outerShdw sx="100000" sy="100000" kx="0" ky="0" algn="bl" rotWithShape="0" blurRad="12700" dist="50800" dir="2700000">
-              <a:srgbClr val="000000">
-                <a:alpha val="8000"/>
-              </a:srgbClr>
-            </a:outerShdw>
-          </a:effectLst>
-        </p:spPr>
-      </p:sp>
-      <p:pic>
-        <p:nvPicPr>
-          <p:cNvPr id="14" name="Image 1" descr="preencoded.png">    </p:cNvPr>
-          <p:cNvPicPr>
-            <a:picLocks noChangeAspect="1"/>
-          </p:cNvPicPr>
-          <p:nvPr/>
-        </p:nvPicPr>
-        <p:blipFill>
-          <a:blip r:embed="rId3">
-            <a:extLst>
-              <a:ext uri="{96DAC541-7B7A-43D3-8B79-37D633B846F1}">
-                <asvg:svgBlip xmlns:asvg="http://schemas.microsoft.com/office/drawing/2016/SVG/main" r:embed="rId4"/>
-              </a:ext>
-            </a:extLst>
-          </a:blip>
-          <a:stretch>
-            <a:fillRect/>
-          </a:stretch>
-        </p:blipFill>
-        <p:spPr>
-          <a:xfrm>
-            <a:off x="914400" y="3191256"/>
-            <a:ext cx="10241280" cy="1024128"/>
-          </a:xfrm>
-          <a:prstGeom prst="rect">
-            <a:avLst/>
-          </a:prstGeom>
-        </p:spPr>
-      </p:pic>
-      <p:sp>
-        <p:nvSpPr>
-          <p:cNvPr id="15" name="Shape 11"/>
-          <p:cNvSpPr/>
-          <p:nvPr/>
-        </p:nvSpPr>
-        <p:spPr>
-          <a:xfrm>
-            <a:off x="914400" y="3191256"/>
-            <a:ext cx="10241280" cy="1024128"/>
-          </a:xfrm>
-          <a:prstGeom prst="rect">
-            <a:avLst/>
-          </a:prstGeom>
-          <a:solidFill>
-            <a:srgbClr val="FBF8F3">
-              <a:alpha val="0"/>
-            </a:srgbClr>
-          </a:solidFill>
-          <a:ln w="12700">
-            <a:solidFill>
-              <a:srgbClr val="C6CCC9">
-                <a:alpha val="0"/>
-              </a:srgbClr>
-            </a:solidFill>
-            <a:prstDash val="solid"/>
-          </a:ln>
-          <a:effectLst>
-            <a:outerShdw sx="100000" sy="100000" kx="0" ky="0" algn="bl" rotWithShape="0" blurRad="12700" dist="50800" dir="2700000">
-              <a:srgbClr val="000000">
-                <a:alpha val="8000"/>
-              </a:srgbClr>
-            </a:outerShdw>
-          </a:effectLst>
-        </p:spPr>
-      </p:sp>
-      <p:pic>
-        <p:nvPicPr>
-          <p:cNvPr id="16" name="Image 2" descr="preencoded.png">    </p:cNvPr>
-          <p:cNvPicPr>
-            <a:picLocks noChangeAspect="1"/>
-          </p:cNvPicPr>
-          <p:nvPr/>
-        </p:nvPicPr>
-        <p:blipFill>
-          <a:blip r:embed="rId5">
-            <a:extLst>
-              <a:ext uri="{96DAC541-7B7A-43D3-8B79-37D633B846F1}">
-                <asvg:svgBlip xmlns:asvg="http://schemas.microsoft.com/office/drawing/2016/SVG/main" r:embed="rId6"/>
-              </a:ext>
-            </a:extLst>
-          </a:blip>
-          <a:stretch>
-            <a:fillRect/>
-          </a:stretch>
-        </p:blipFill>
-        <p:spPr>
-          <a:xfrm>
-            <a:off x="914400" y="4507992"/>
-            <a:ext cx="10241280" cy="1024128"/>
-          </a:xfrm>
-          <a:prstGeom prst="rect">
-            <a:avLst/>
-          </a:prstGeom>
-        </p:spPr>
-      </p:pic>
-      <p:sp>
-        <p:nvSpPr>
-          <p:cNvPr id="17" name="Shape 12"/>
-          <p:cNvSpPr/>
-          <p:nvPr/>
-        </p:nvSpPr>
-        <p:spPr>
-          <a:xfrm>
-            <a:off x="914400" y="4507992"/>
-            <a:ext cx="10241280" cy="1024128"/>
-          </a:xfrm>
-          <a:prstGeom prst="rect">
-            <a:avLst/>
-          </a:prstGeom>
-          <a:solidFill>
-            <a:srgbClr val="FBF8F3">
-              <a:alpha val="0"/>
-            </a:srgbClr>
-          </a:solidFill>
-          <a:ln w="12700">
-            <a:solidFill>
-              <a:srgbClr val="C6CCC9">
-                <a:alpha val="0"/>
-              </a:srgbClr>
-            </a:solidFill>
-            <a:prstDash val="solid"/>
-          </a:ln>
-          <a:effectLst>
-            <a:outerShdw sx="100000" sy="100000" kx="0" ky="0" algn="bl" rotWithShape="0" blurRad="12700" dist="50800" dir="2700000">
-              <a:srgbClr val="000000">
-                <a:alpha val="8000"/>
-              </a:srgbClr>
-            </a:outerShdw>
-          </a:effectLst>
-        </p:spPr>
-      </p:sp>
-      <p:sp>
-        <p:nvSpPr>
-          <p:cNvPr id="18" name="Text 13"/>
+      <p:sp>
+        <p:nvSpPr>
+          <p:cNvPr id="10" name="Text 8"/>
           <p:cNvSpPr txBox="1"/>
           <p:nvPr/>
         </p:nvSpPr>
@@ -5492,71 +5238,14 @@
       </p:sp>
       <p:sp>
         <p:nvSpPr>
-          <p:cNvPr id="19" name="Shape 14"/>
-          <p:cNvSpPr/>
-          <p:nvPr/>
-        </p:nvSpPr>
-        <p:spPr>
-          <a:xfrm>
-            <a:off x="1097280" y="2140428"/>
-            <a:ext cx="474025" cy="474025"/>
-          </a:xfrm>
-          <a:prstGeom prst="roundRect">
-            <a:avLst>
-              <a:gd name="adj" fmla="val 7716"/>
-            </a:avLst>
-          </a:prstGeom>
-          <a:solidFill>
-            <a:srgbClr val="F8F4EF"/>
-          </a:solidFill>
-          <a:ln w="12700">
-            <a:solidFill>
-              <a:srgbClr val="C6CCC9"/>
-            </a:solidFill>
-            <a:prstDash val="solid"/>
-          </a:ln>
-        </p:spPr>
-      </p:sp>
-      <p:pic>
-        <p:nvPicPr>
-          <p:cNvPr id="20" name="Image 3" descr="article icon from tabler-icons (MIT)">    </p:cNvPr>
-          <p:cNvPicPr>
-            <a:picLocks noChangeAspect="1"/>
-          </p:cNvPicPr>
-          <p:nvPr/>
-        </p:nvPicPr>
-        <p:blipFill>
-          <a:blip r:embed="rId7">
-            <a:extLst>
-              <a:ext uri="{96DAC541-7B7A-43D3-8B79-37D633B846F1}">
-                <asvg:svgBlip xmlns:asvg="http://schemas.microsoft.com/office/drawing/2016/SVG/main" r:embed="rId8"/>
-              </a:ext>
-            </a:extLst>
-          </a:blip>
-          <a:stretch>
-            <a:fillRect/>
-          </a:stretch>
-        </p:blipFill>
-        <p:spPr>
-          <a:xfrm>
-            <a:off x="1170432" y="2213580"/>
-            <a:ext cx="327721" cy="327721"/>
-          </a:xfrm>
-          <a:prstGeom prst="rect">
-            <a:avLst/>
-          </a:prstGeom>
-        </p:spPr>
-      </p:pic>
-      <p:sp>
-        <p:nvSpPr>
-          <p:cNvPr id="21" name="Text 15"/>
+          <p:cNvPr id="11" name="Text 9"/>
           <p:cNvSpPr txBox="1"/>
           <p:nvPr/>
         </p:nvSpPr>
         <p:spPr>
           <a:xfrm>
-            <a:off x="1699321" y="1996440"/>
-            <a:ext cx="9255191" cy="762000"/>
+            <a:off x="896112" y="3200400"/>
+            <a:ext cx="4791456" cy="1097280"/>
           </a:xfrm>
           <a:prstGeom prst="rect">
             <a:avLst/>
@@ -5568,7 +5257,7 @@
           <a:bodyPr wrap="square" lIns="0" tIns="25400" rIns="25400" bIns="0" rtlCol="0" anchor="ctr"/>
           <a:lstStyle/>
           <a:p>
-            <a:pPr algn="ctr" indent="0" marL="0">
+            <a:pPr algn="l" indent="0" marL="0">
               <a:lnSpc>
                 <a:spcPct val="120000"/>
               </a:lnSpc>
@@ -5583,7 +5272,7 @@
                 <a:ea typeface="Pretendard" pitchFamily="34" charset="-122"/>
                 <a:cs typeface="Pretendard" pitchFamily="34" charset="-120"/>
               </a:rPr>
-              <a:t>Create a New React App if you're looking for a powerful JavaScript toolchain.</a:t>
+              <a:t>- Create a New React App if you're looking for a powerful JavaScript toolchain.</a:t>
             </a:r>
             <a:endParaRPr lang="en-US" sz="2200" dirty="0"/>
           </a:p>
@@ -5591,71 +5280,14 @@
       </p:sp>
       <p:sp>
         <p:nvSpPr>
-          <p:cNvPr id="22" name="Shape 16"/>
-          <p:cNvSpPr/>
-          <p:nvPr/>
-        </p:nvSpPr>
-        <p:spPr>
-          <a:xfrm>
-            <a:off x="1097280" y="3466308"/>
-            <a:ext cx="474025" cy="474025"/>
-          </a:xfrm>
-          <a:prstGeom prst="roundRect">
-            <a:avLst>
-              <a:gd name="adj" fmla="val 7716"/>
-            </a:avLst>
-          </a:prstGeom>
-          <a:solidFill>
-            <a:srgbClr val="F8F4EF"/>
-          </a:solidFill>
-          <a:ln w="12700">
-            <a:solidFill>
-              <a:srgbClr val="C6CCC9"/>
-            </a:solidFill>
-            <a:prstDash val="solid"/>
-          </a:ln>
-        </p:spPr>
-      </p:sp>
-      <p:pic>
-        <p:nvPicPr>
-          <p:cNvPr id="23" name="Image 4" descr="article icon from tabler-icons (MIT)">    </p:cNvPr>
-          <p:cNvPicPr>
-            <a:picLocks noChangeAspect="1"/>
-          </p:cNvPicPr>
-          <p:nvPr/>
-        </p:nvPicPr>
-        <p:blipFill>
-          <a:blip r:embed="rId9">
-            <a:extLst>
-              <a:ext uri="{96DAC541-7B7A-43D3-8B79-37D633B846F1}">
-                <asvg:svgBlip xmlns:asvg="http://schemas.microsoft.com/office/drawing/2016/SVG/main" r:embed="rId10"/>
-              </a:ext>
-            </a:extLst>
-          </a:blip>
-          <a:stretch>
-            <a:fillRect/>
-          </a:stretch>
-        </p:blipFill>
-        <p:spPr>
-          <a:xfrm>
-            <a:off x="1170432" y="3539460"/>
-            <a:ext cx="327721" cy="327721"/>
-          </a:xfrm>
-          <a:prstGeom prst="rect">
-            <a:avLst/>
-          </a:prstGeom>
-        </p:spPr>
-      </p:pic>
-      <p:sp>
-        <p:nvSpPr>
-          <p:cNvPr id="24" name="Text 17"/>
+          <p:cNvPr id="12" name="Text 10"/>
           <p:cNvSpPr txBox="1"/>
           <p:nvPr/>
         </p:nvSpPr>
         <p:spPr>
           <a:xfrm>
-            <a:off x="1699321" y="3489960"/>
-            <a:ext cx="9255191" cy="426720"/>
+            <a:off x="6473952" y="3535680"/>
+            <a:ext cx="4791456" cy="426720"/>
           </a:xfrm>
           <a:prstGeom prst="rect">
             <a:avLst/>
@@ -5667,7 +5299,7 @@
           <a:bodyPr wrap="square" lIns="0" tIns="25400" rIns="25400" bIns="0" rtlCol="0" anchor="ctr"/>
           <a:lstStyle/>
           <a:p>
-            <a:pPr algn="ctr" indent="0" marL="0">
+            <a:pPr algn="l" indent="0" marL="0">
               <a:lnSpc>
                 <a:spcPct val="120000"/>
               </a:lnSpc>
@@ -5682,106 +5314,7 @@
                 <a:ea typeface="Pretendard" pitchFamily="34" charset="-122"/>
                 <a:cs typeface="Pretendard" pitchFamily="34" charset="-120"/>
               </a:rPr>
-              <a:t>Adding Interactivity</a:t>
-            </a:r>
-            <a:endParaRPr lang="en-US" sz="2200" dirty="0"/>
-          </a:p>
-        </p:txBody>
-      </p:sp>
-      <p:sp>
-        <p:nvSpPr>
-          <p:cNvPr id="25" name="Shape 18"/>
-          <p:cNvSpPr/>
-          <p:nvPr/>
-        </p:nvSpPr>
-        <p:spPr>
-          <a:xfrm>
-            <a:off x="1097280" y="4783044"/>
-            <a:ext cx="474025" cy="474025"/>
-          </a:xfrm>
-          <a:prstGeom prst="roundRect">
-            <a:avLst>
-              <a:gd name="adj" fmla="val 7716"/>
-            </a:avLst>
-          </a:prstGeom>
-          <a:solidFill>
-            <a:srgbClr val="F8F4EF"/>
-          </a:solidFill>
-          <a:ln w="12700">
-            <a:solidFill>
-              <a:srgbClr val="C6CCC9"/>
-            </a:solidFill>
-            <a:prstDash val="solid"/>
-          </a:ln>
-        </p:spPr>
-      </p:sp>
-      <p:pic>
-        <p:nvPicPr>
-          <p:cNvPr id="26" name="Image 5" descr="article icon from tabler-icons (MIT)">    </p:cNvPr>
-          <p:cNvPicPr>
-            <a:picLocks noChangeAspect="1"/>
-          </p:cNvPicPr>
-          <p:nvPr/>
-        </p:nvPicPr>
-        <p:blipFill>
-          <a:blip r:embed="rId11">
-            <a:extLst>
-              <a:ext uri="{96DAC541-7B7A-43D3-8B79-37D633B846F1}">
-                <asvg:svgBlip xmlns:asvg="http://schemas.microsoft.com/office/drawing/2016/SVG/main" r:embed="rId12"/>
-              </a:ext>
-            </a:extLst>
-          </a:blip>
-          <a:stretch>
-            <a:fillRect/>
-          </a:stretch>
-        </p:blipFill>
-        <p:spPr>
-          <a:xfrm>
-            <a:off x="1170432" y="4856196"/>
-            <a:ext cx="327721" cy="327721"/>
-          </a:xfrm>
-          <a:prstGeom prst="rect">
-            <a:avLst/>
-          </a:prstGeom>
-        </p:spPr>
-      </p:pic>
-      <p:sp>
-        <p:nvSpPr>
-          <p:cNvPr id="27" name="Text 19"/>
-          <p:cNvSpPr txBox="1"/>
-          <p:nvPr/>
-        </p:nvSpPr>
-        <p:spPr>
-          <a:xfrm>
-            <a:off x="1699321" y="4806696"/>
-            <a:ext cx="9255191" cy="426720"/>
-          </a:xfrm>
-          <a:prstGeom prst="rect">
-            <a:avLst/>
-          </a:prstGeom>
-          <a:noFill/>
-          <a:ln/>
-        </p:spPr>
-        <p:txBody>
-          <a:bodyPr wrap="square" lIns="0" tIns="25400" rIns="25400" bIns="0" rtlCol="0" anchor="ctr"/>
-          <a:lstStyle/>
-          <a:p>
-            <a:pPr algn="ctr" indent="0" marL="0">
-              <a:lnSpc>
-                <a:spcPct val="120000"/>
-              </a:lnSpc>
-              <a:buNone/>
-            </a:pPr>
-            <a:r>
-              <a:rPr lang="en-US" sz="2200" dirty="0">
-                <a:solidFill>
-                  <a:srgbClr val="18181B"/>
-                </a:solidFill>
-                <a:latin typeface="Pretendard" pitchFamily="34" charset="0"/>
-                <a:ea typeface="Pretendard" pitchFamily="34" charset="-122"/>
-                <a:cs typeface="Pretendard" pitchFamily="34" charset="-120"/>
-              </a:rPr>
-              <a:t>Where to Get Support</a:t>
+              <a:t>- Adding Interactivity</a:t>
             </a:r>
             <a:endParaRPr lang="en-US" sz="2200" dirty="0"/>
           </a:p>
@@ -7752,7 +7285,7 @@
                 <a:ea typeface="Pretendard" pitchFamily="34" charset="-122"/>
                 <a:cs typeface="Pretendard" pitchFamily="34" charset="-120"/>
               </a:rPr>
-              <a:t>03. vuejs/core</a:t>
+              <a:t>03. Vue</a:t>
             </a:r>
             <a:endParaRPr lang="en-US" sz="3400" dirty="0"/>
           </a:p>
@@ -8378,7 +7911,7 @@
                 <a:ea typeface="Pretendard" pitchFamily="34" charset="-122"/>
                 <a:cs typeface="Pretendard" pitchFamily="34" charset="-120"/>
               </a:rPr>
-              <a:t>03. vuejs/core (Cont. 2/2)</a:t>
+              <a:t>03. Vue (Cont. 2/2)</a:t>
             </a:r>
             <a:endParaRPr lang="en-US" sz="3400" dirty="0"/>
           </a:p>
@@ -10734,37 +10267,8 @@
         </p:nvSpPr>
         <p:spPr>
           <a:xfrm>
-            <a:off x="786384" y="1956816"/>
-            <a:ext cx="32004" cy="3483864"/>
-          </a:xfrm>
-          <a:prstGeom prst="rect">
-            <a:avLst/>
-          </a:prstGeom>
-          <a:solidFill>
-            <a:srgbClr val="9E0F62">
-              <a:alpha val="80000"/>
-            </a:srgbClr>
-          </a:solidFill>
-          <a:ln w="12700">
-            <a:solidFill>
-              <a:srgbClr val="9E0F62">
-                <a:alpha val="0"/>
-              </a:srgbClr>
-            </a:solidFill>
-            <a:prstDash val="solid"/>
-          </a:ln>
-        </p:spPr>
-      </p:sp>
-      <p:sp>
-        <p:nvSpPr>
-          <p:cNvPr id="9" name="Shape 7"/>
-          <p:cNvSpPr/>
-          <p:nvPr/>
-        </p:nvSpPr>
-        <p:spPr>
-          <a:xfrm>
-            <a:off x="914400" y="1865376"/>
-            <a:ext cx="73152" cy="1024128"/>
+            <a:off x="822960" y="1554480"/>
+            <a:ext cx="4937760" cy="73152"/>
           </a:xfrm>
           <a:prstGeom prst="rect">
             <a:avLst/>
@@ -10784,41 +10288,14 @@
       </p:sp>
       <p:sp>
         <p:nvSpPr>
-          <p:cNvPr id="10" name="Shape 8"/>
-          <p:cNvSpPr/>
-          <p:nvPr/>
-        </p:nvSpPr>
-        <p:spPr>
-          <a:xfrm>
-            <a:off x="914400" y="3191256"/>
-            <a:ext cx="73152" cy="1024128"/>
-          </a:xfrm>
-          <a:prstGeom prst="rect">
-            <a:avLst/>
-          </a:prstGeom>
-          <a:solidFill>
-            <a:srgbClr val="9E0F62"/>
-          </a:solidFill>
-          <a:ln w="12700">
-            <a:solidFill>
-              <a:srgbClr val="9E0F62">
-                <a:alpha val="0"/>
-              </a:srgbClr>
-            </a:solidFill>
-            <a:prstDash val="solid"/>
-          </a:ln>
-        </p:spPr>
-      </p:sp>
-      <p:sp>
-        <p:nvSpPr>
-          <p:cNvPr id="11" name="Shape 9"/>
-          <p:cNvSpPr/>
-          <p:nvPr/>
-        </p:nvSpPr>
-        <p:spPr>
-          <a:xfrm>
-            <a:off x="914400" y="4507992"/>
-            <a:ext cx="73152" cy="1024128"/>
+          <p:cNvPr id="9" name="Shape 7"/>
+          <p:cNvSpPr/>
+          <p:nvPr/>
+        </p:nvSpPr>
+        <p:spPr>
+          <a:xfrm>
+            <a:off x="6400800" y="1554480"/>
+            <a:ext cx="4937760" cy="73152"/>
           </a:xfrm>
           <a:prstGeom prst="rect">
             <a:avLst/>
@@ -10836,207 +10313,9 @@
           </a:ln>
         </p:spPr>
       </p:sp>
-      <p:pic>
-        <p:nvPicPr>
-          <p:cNvPr id="12" name="Image 0" descr="preencoded.png">    </p:cNvPr>
-          <p:cNvPicPr>
-            <a:picLocks noChangeAspect="1"/>
-          </p:cNvPicPr>
-          <p:nvPr/>
-        </p:nvPicPr>
-        <p:blipFill>
-          <a:blip r:embed="rId1">
-            <a:extLst>
-              <a:ext uri="{96DAC541-7B7A-43D3-8B79-37D633B846F1}">
-                <asvg:svgBlip xmlns:asvg="http://schemas.microsoft.com/office/drawing/2016/SVG/main" r:embed="rId2"/>
-              </a:ext>
-            </a:extLst>
-          </a:blip>
-          <a:stretch>
-            <a:fillRect/>
-          </a:stretch>
-        </p:blipFill>
-        <p:spPr>
-          <a:xfrm>
-            <a:off x="914400" y="1865376"/>
-            <a:ext cx="10241280" cy="1024128"/>
-          </a:xfrm>
-          <a:prstGeom prst="rect">
-            <a:avLst/>
-          </a:prstGeom>
-        </p:spPr>
-      </p:pic>
-      <p:sp>
-        <p:nvSpPr>
-          <p:cNvPr id="13" name="Shape 10"/>
-          <p:cNvSpPr/>
-          <p:nvPr/>
-        </p:nvSpPr>
-        <p:spPr>
-          <a:xfrm>
-            <a:off x="914400" y="1865376"/>
-            <a:ext cx="10241280" cy="1024128"/>
-          </a:xfrm>
-          <a:prstGeom prst="rect">
-            <a:avLst/>
-          </a:prstGeom>
-          <a:solidFill>
-            <a:srgbClr val="FBF8F3">
-              <a:alpha val="0"/>
-            </a:srgbClr>
-          </a:solidFill>
-          <a:ln w="12700">
-            <a:solidFill>
-              <a:srgbClr val="C6CCC9">
-                <a:alpha val="0"/>
-              </a:srgbClr>
-            </a:solidFill>
-            <a:prstDash val="solid"/>
-          </a:ln>
-          <a:effectLst>
-            <a:outerShdw sx="100000" sy="100000" kx="0" ky="0" algn="bl" rotWithShape="0" blurRad="12700" dist="50800" dir="2700000">
-              <a:srgbClr val="000000">
-                <a:alpha val="8000"/>
-              </a:srgbClr>
-            </a:outerShdw>
-          </a:effectLst>
-        </p:spPr>
-      </p:sp>
-      <p:pic>
-        <p:nvPicPr>
-          <p:cNvPr id="14" name="Image 1" descr="preencoded.png">    </p:cNvPr>
-          <p:cNvPicPr>
-            <a:picLocks noChangeAspect="1"/>
-          </p:cNvPicPr>
-          <p:nvPr/>
-        </p:nvPicPr>
-        <p:blipFill>
-          <a:blip r:embed="rId3">
-            <a:extLst>
-              <a:ext uri="{96DAC541-7B7A-43D3-8B79-37D633B846F1}">
-                <asvg:svgBlip xmlns:asvg="http://schemas.microsoft.com/office/drawing/2016/SVG/main" r:embed="rId4"/>
-              </a:ext>
-            </a:extLst>
-          </a:blip>
-          <a:stretch>
-            <a:fillRect/>
-          </a:stretch>
-        </p:blipFill>
-        <p:spPr>
-          <a:xfrm>
-            <a:off x="914400" y="3191256"/>
-            <a:ext cx="10241280" cy="1024128"/>
-          </a:xfrm>
-          <a:prstGeom prst="rect">
-            <a:avLst/>
-          </a:prstGeom>
-        </p:spPr>
-      </p:pic>
-      <p:sp>
-        <p:nvSpPr>
-          <p:cNvPr id="15" name="Shape 11"/>
-          <p:cNvSpPr/>
-          <p:nvPr/>
-        </p:nvSpPr>
-        <p:spPr>
-          <a:xfrm>
-            <a:off x="914400" y="3191256"/>
-            <a:ext cx="10241280" cy="1024128"/>
-          </a:xfrm>
-          <a:prstGeom prst="rect">
-            <a:avLst/>
-          </a:prstGeom>
-          <a:solidFill>
-            <a:srgbClr val="FBF8F3">
-              <a:alpha val="0"/>
-            </a:srgbClr>
-          </a:solidFill>
-          <a:ln w="12700">
-            <a:solidFill>
-              <a:srgbClr val="C6CCC9">
-                <a:alpha val="0"/>
-              </a:srgbClr>
-            </a:solidFill>
-            <a:prstDash val="solid"/>
-          </a:ln>
-          <a:effectLst>
-            <a:outerShdw sx="100000" sy="100000" kx="0" ky="0" algn="bl" rotWithShape="0" blurRad="12700" dist="50800" dir="2700000">
-              <a:srgbClr val="000000">
-                <a:alpha val="8000"/>
-              </a:srgbClr>
-            </a:outerShdw>
-          </a:effectLst>
-        </p:spPr>
-      </p:sp>
-      <p:pic>
-        <p:nvPicPr>
-          <p:cNvPr id="16" name="Image 2" descr="preencoded.png">    </p:cNvPr>
-          <p:cNvPicPr>
-            <a:picLocks noChangeAspect="1"/>
-          </p:cNvPicPr>
-          <p:nvPr/>
-        </p:nvPicPr>
-        <p:blipFill>
-          <a:blip r:embed="rId5">
-            <a:extLst>
-              <a:ext uri="{96DAC541-7B7A-43D3-8B79-37D633B846F1}">
-                <asvg:svgBlip xmlns:asvg="http://schemas.microsoft.com/office/drawing/2016/SVG/main" r:embed="rId6"/>
-              </a:ext>
-            </a:extLst>
-          </a:blip>
-          <a:stretch>
-            <a:fillRect/>
-          </a:stretch>
-        </p:blipFill>
-        <p:spPr>
-          <a:xfrm>
-            <a:off x="914400" y="4507992"/>
-            <a:ext cx="10241280" cy="1024128"/>
-          </a:xfrm>
-          <a:prstGeom prst="rect">
-            <a:avLst/>
-          </a:prstGeom>
-        </p:spPr>
-      </p:pic>
-      <p:sp>
-        <p:nvSpPr>
-          <p:cNvPr id="17" name="Shape 12"/>
-          <p:cNvSpPr/>
-          <p:nvPr/>
-        </p:nvSpPr>
-        <p:spPr>
-          <a:xfrm>
-            <a:off x="914400" y="4507992"/>
-            <a:ext cx="10241280" cy="1024128"/>
-          </a:xfrm>
-          <a:prstGeom prst="rect">
-            <a:avLst/>
-          </a:prstGeom>
-          <a:solidFill>
-            <a:srgbClr val="FBF8F3">
-              <a:alpha val="0"/>
-            </a:srgbClr>
-          </a:solidFill>
-          <a:ln w="12700">
-            <a:solidFill>
-              <a:srgbClr val="C6CCC9">
-                <a:alpha val="0"/>
-              </a:srgbClr>
-            </a:solidFill>
-            <a:prstDash val="solid"/>
-          </a:ln>
-          <a:effectLst>
-            <a:outerShdw sx="100000" sy="100000" kx="0" ky="0" algn="bl" rotWithShape="0" blurRad="12700" dist="50800" dir="2700000">
-              <a:srgbClr val="000000">
-                <a:alpha val="8000"/>
-              </a:srgbClr>
-            </a:outerShdw>
-          </a:effectLst>
-        </p:spPr>
-      </p:sp>
-      <p:sp>
-        <p:nvSpPr>
-          <p:cNvPr id="18" name="Text 13"/>
+      <p:sp>
+        <p:nvSpPr>
+          <p:cNvPr id="10" name="Text 8"/>
           <p:cNvSpPr txBox="1"/>
           <p:nvPr/>
         </p:nvSpPr>
@@ -11078,71 +10357,14 @@
       </p:sp>
       <p:sp>
         <p:nvSpPr>
-          <p:cNvPr id="19" name="Shape 14"/>
-          <p:cNvSpPr/>
-          <p:nvPr/>
-        </p:nvSpPr>
-        <p:spPr>
-          <a:xfrm>
-            <a:off x="1097280" y="2140428"/>
-            <a:ext cx="474025" cy="474025"/>
-          </a:xfrm>
-          <a:prstGeom prst="roundRect">
-            <a:avLst>
-              <a:gd name="adj" fmla="val 7716"/>
-            </a:avLst>
-          </a:prstGeom>
-          <a:solidFill>
-            <a:srgbClr val="F8F4EF"/>
-          </a:solidFill>
-          <a:ln w="12700">
-            <a:solidFill>
-              <a:srgbClr val="C6CCC9"/>
-            </a:solidFill>
-            <a:prstDash val="solid"/>
-          </a:ln>
-        </p:spPr>
-      </p:sp>
-      <p:pic>
-        <p:nvPicPr>
-          <p:cNvPr id="20" name="Image 3" descr="article icon from tabler-icons (MIT)">    </p:cNvPr>
-          <p:cNvPicPr>
-            <a:picLocks noChangeAspect="1"/>
-          </p:cNvPicPr>
-          <p:nvPr/>
-        </p:nvPicPr>
-        <p:blipFill>
-          <a:blip r:embed="rId7">
-            <a:extLst>
-              <a:ext uri="{96DAC541-7B7A-43D3-8B79-37D633B846F1}">
-                <asvg:svgBlip xmlns:asvg="http://schemas.microsoft.com/office/drawing/2016/SVG/main" r:embed="rId8"/>
-              </a:ext>
-            </a:extLst>
-          </a:blip>
-          <a:stretch>
-            <a:fillRect/>
-          </a:stretch>
-        </p:blipFill>
-        <p:spPr>
-          <a:xfrm>
-            <a:off x="1170432" y="2213580"/>
-            <a:ext cx="327721" cy="327721"/>
-          </a:xfrm>
-          <a:prstGeom prst="rect">
-            <a:avLst/>
-          </a:prstGeom>
-        </p:spPr>
-      </p:pic>
-      <p:sp>
-        <p:nvSpPr>
-          <p:cNvPr id="21" name="Text 15"/>
+          <p:cNvPr id="11" name="Text 9"/>
           <p:cNvSpPr txBox="1"/>
           <p:nvPr/>
         </p:nvSpPr>
         <p:spPr>
           <a:xfrm>
-            <a:off x="1699321" y="1957548"/>
-            <a:ext cx="9255191" cy="839785"/>
+            <a:off x="896112" y="1664208"/>
+            <a:ext cx="4791456" cy="4169664"/>
           </a:xfrm>
           <a:prstGeom prst="rect">
             <a:avLst/>
@@ -11151,7 +10373,7 @@
           <a:ln/>
         </p:spPr>
         <p:txBody>
-          <a:bodyPr wrap="square" lIns="0" tIns="25400" rIns="25400" bIns="0" rtlCol="0" anchor="ctr"/>
+          <a:bodyPr wrap="square" lIns="0" tIns="25400" rIns="25400" bIns="0" rtlCol="0" anchor="t"/>
           <a:lstStyle/>
           <a:p>
             <a:pPr algn="l" indent="0" marL="0">
@@ -11169,7 +10391,7 @@
                 <a:ea typeface="Pretendard" pitchFamily="34" charset="-122"/>
                 <a:cs typeface="Pretendard" pitchFamily="34" charset="-120"/>
               </a:rPr>
-              <a:t>Serious regressions from 5.9 (these must </a:t>
+              <a:t>- Serious regressions from 5.9 (these must </a:t>
             </a:r>
             <a:pPr algn="l" indent="0" marL="0">
               <a:lnSpc>
@@ -11245,71 +10467,14 @@
       </p:sp>
       <p:sp>
         <p:nvSpPr>
-          <p:cNvPr id="22" name="Shape 16"/>
-          <p:cNvSpPr/>
-          <p:nvPr/>
-        </p:nvSpPr>
-        <p:spPr>
-          <a:xfrm>
-            <a:off x="1097280" y="3466308"/>
-            <a:ext cx="474025" cy="474025"/>
-          </a:xfrm>
-          <a:prstGeom prst="roundRect">
-            <a:avLst>
-              <a:gd name="adj" fmla="val 7716"/>
-            </a:avLst>
-          </a:prstGeom>
-          <a:solidFill>
-            <a:srgbClr val="F8F4EF"/>
-          </a:solidFill>
-          <a:ln w="12700">
-            <a:solidFill>
-              <a:srgbClr val="C6CCC9"/>
-            </a:solidFill>
-            <a:prstDash val="solid"/>
-          </a:ln>
-        </p:spPr>
-      </p:sp>
-      <p:pic>
-        <p:nvPicPr>
-          <p:cNvPr id="23" name="Image 4" descr="verified icon from tabler-icons (MIT)">    </p:cNvPr>
-          <p:cNvPicPr>
-            <a:picLocks noChangeAspect="1"/>
-          </p:cNvPicPr>
-          <p:nvPr/>
-        </p:nvPicPr>
-        <p:blipFill>
-          <a:blip r:embed="rId9">
-            <a:extLst>
-              <a:ext uri="{96DAC541-7B7A-43D3-8B79-37D633B846F1}">
-                <asvg:svgBlip xmlns:asvg="http://schemas.microsoft.com/office/drawing/2016/SVG/main" r:embed="rId10"/>
-              </a:ext>
-            </a:extLst>
-          </a:blip>
-          <a:stretch>
-            <a:fillRect/>
-          </a:stretch>
-        </p:blipFill>
-        <p:spPr>
-          <a:xfrm>
-            <a:off x="1170432" y="3539460"/>
-            <a:ext cx="327721" cy="327721"/>
-          </a:xfrm>
-          <a:prstGeom prst="rect">
-            <a:avLst/>
-          </a:prstGeom>
-        </p:spPr>
-      </p:pic>
-      <p:sp>
-        <p:nvSpPr>
-          <p:cNvPr id="24" name="Text 17"/>
+          <p:cNvPr id="12" name="Text 10"/>
           <p:cNvSpPr txBox="1"/>
           <p:nvPr/>
         </p:nvSpPr>
         <p:spPr>
           <a:xfrm>
-            <a:off x="1699321" y="3489960"/>
-            <a:ext cx="9255191" cy="426720"/>
+            <a:off x="6473952" y="3368040"/>
+            <a:ext cx="4791456" cy="762000"/>
           </a:xfrm>
           <a:prstGeom prst="rect">
             <a:avLst/>
@@ -11321,7 +10486,7 @@
           <a:bodyPr wrap="square" lIns="0" tIns="25400" rIns="25400" bIns="0" rtlCol="0" anchor="ctr"/>
           <a:lstStyle/>
           <a:p>
-            <a:pPr algn="ctr" indent="0" marL="0">
+            <a:pPr algn="l" indent="0" marL="0">
               <a:lnSpc>
                 <a:spcPct val="120000"/>
               </a:lnSpc>
@@ -11336,106 +10501,7 @@
                 <a:ea typeface="Pretendard" pitchFamily="34" charset="-122"/>
                 <a:cs typeface="Pretendard" pitchFamily="34" charset="-120"/>
               </a:rPr>
-              <a:t>Submit bugs and help us verify fixes as they are checked in.</a:t>
-            </a:r>
-            <a:endParaRPr lang="en-US" sz="2200" dirty="0"/>
-          </a:p>
-        </p:txBody>
-      </p:sp>
-      <p:sp>
-        <p:nvSpPr>
-          <p:cNvPr id="25" name="Shape 18"/>
-          <p:cNvSpPr/>
-          <p:nvPr/>
-        </p:nvSpPr>
-        <p:spPr>
-          <a:xfrm>
-            <a:off x="1097280" y="4783044"/>
-            <a:ext cx="474025" cy="474025"/>
-          </a:xfrm>
-          <a:prstGeom prst="roundRect">
-            <a:avLst>
-              <a:gd name="adj" fmla="val 7716"/>
-            </a:avLst>
-          </a:prstGeom>
-          <a:solidFill>
-            <a:srgbClr val="F8F4EF"/>
-          </a:solidFill>
-          <a:ln w="12700">
-            <a:solidFill>
-              <a:srgbClr val="C6CCC9"/>
-            </a:solidFill>
-            <a:prstDash val="solid"/>
-          </a:ln>
-        </p:spPr>
-      </p:sp>
-      <p:pic>
-        <p:nvPicPr>
-          <p:cNvPr id="26" name="Image 5" descr="code icon from tabler-icons (MIT)">    </p:cNvPr>
-          <p:cNvPicPr>
-            <a:picLocks noChangeAspect="1"/>
-          </p:cNvPicPr>
-          <p:nvPr/>
-        </p:nvPicPr>
-        <p:blipFill>
-          <a:blip r:embed="rId11">
-            <a:extLst>
-              <a:ext uri="{96DAC541-7B7A-43D3-8B79-37D633B846F1}">
-                <asvg:svgBlip xmlns:asvg="http://schemas.microsoft.com/office/drawing/2016/SVG/main" r:embed="rId12"/>
-              </a:ext>
-            </a:extLst>
-          </a:blip>
-          <a:stretch>
-            <a:fillRect/>
-          </a:stretch>
-        </p:blipFill>
-        <p:spPr>
-          <a:xfrm>
-            <a:off x="1170432" y="4856196"/>
-            <a:ext cx="327721" cy="327721"/>
-          </a:xfrm>
-          <a:prstGeom prst="rect">
-            <a:avLst/>
-          </a:prstGeom>
-        </p:spPr>
-      </p:pic>
-      <p:sp>
-        <p:nvSpPr>
-          <p:cNvPr id="27" name="Text 19"/>
-          <p:cNvSpPr txBox="1"/>
-          <p:nvPr/>
-        </p:nvSpPr>
-        <p:spPr>
-          <a:xfrm>
-            <a:off x="1699321" y="4806696"/>
-            <a:ext cx="9255191" cy="426720"/>
-          </a:xfrm>
-          <a:prstGeom prst="rect">
-            <a:avLst/>
-          </a:prstGeom>
-          <a:noFill/>
-          <a:ln/>
-        </p:spPr>
-        <p:txBody>
-          <a:bodyPr wrap="square" lIns="0" tIns="25400" rIns="25400" bIns="0" rtlCol="0" anchor="ctr"/>
-          <a:lstStyle/>
-          <a:p>
-            <a:pPr algn="ctr" indent="0" marL="0">
-              <a:lnSpc>
-                <a:spcPct val="120000"/>
-              </a:lnSpc>
-              <a:buNone/>
-            </a:pPr>
-            <a:r>
-              <a:rPr lang="en-US" sz="2200" dirty="0">
-                <a:solidFill>
-                  <a:srgbClr val="18181B"/>
-                </a:solidFill>
-                <a:latin typeface="Pretendard" pitchFamily="34" charset="0"/>
-                <a:ea typeface="Pretendard" pitchFamily="34" charset="-122"/>
-                <a:cs typeface="Pretendard" pitchFamily="34" charset="-120"/>
-              </a:rPr>
-              <a:t>Review the source code changes.</a:t>
+              <a:t>- Submit bugs and help us verify fixes as they are checked in.</a:t>
             </a:r>
             <a:endParaRPr lang="en-US" sz="2200" dirty="0"/>
           </a:p>
@@ -13558,7 +12624,7 @@
                 <a:ea typeface="Pretendard" pitchFamily="34" charset="-122"/>
                 <a:cs typeface="Pretendard" pitchFamily="34" charset="-120"/>
               </a:rPr>
-              <a:t>09  03. vuejs/core</a:t>
+              <a:t>09  03. Vue</a:t>
             </a:r>
             <a:endParaRPr lang="en-US" sz="1800" dirty="0"/>
           </a:p>
@@ -13981,37 +13047,8 @@
         </p:nvSpPr>
         <p:spPr>
           <a:xfrm>
-            <a:off x="786384" y="1956816"/>
-            <a:ext cx="32004" cy="3483864"/>
-          </a:xfrm>
-          <a:prstGeom prst="rect">
-            <a:avLst/>
-          </a:prstGeom>
-          <a:solidFill>
-            <a:srgbClr val="9E0F62">
-              <a:alpha val="80000"/>
-            </a:srgbClr>
-          </a:solidFill>
-          <a:ln w="12700">
-            <a:solidFill>
-              <a:srgbClr val="9E0F62">
-                <a:alpha val="0"/>
-              </a:srgbClr>
-            </a:solidFill>
-            <a:prstDash val="solid"/>
-          </a:ln>
-        </p:spPr>
-      </p:sp>
-      <p:sp>
-        <p:nvSpPr>
-          <p:cNvPr id="9" name="Shape 7"/>
-          <p:cNvSpPr/>
-          <p:nvPr/>
-        </p:nvSpPr>
-        <p:spPr>
-          <a:xfrm>
-            <a:off x="914400" y="1865376"/>
-            <a:ext cx="73152" cy="1024128"/>
+            <a:off x="822960" y="1554480"/>
+            <a:ext cx="4937760" cy="73152"/>
           </a:xfrm>
           <a:prstGeom prst="rect">
             <a:avLst/>
@@ -14031,41 +13068,14 @@
       </p:sp>
       <p:sp>
         <p:nvSpPr>
-          <p:cNvPr id="10" name="Shape 8"/>
-          <p:cNvSpPr/>
-          <p:nvPr/>
-        </p:nvSpPr>
-        <p:spPr>
-          <a:xfrm>
-            <a:off x="914400" y="3191256"/>
-            <a:ext cx="73152" cy="1024128"/>
-          </a:xfrm>
-          <a:prstGeom prst="rect">
-            <a:avLst/>
-          </a:prstGeom>
-          <a:solidFill>
-            <a:srgbClr val="9E0F62"/>
-          </a:solidFill>
-          <a:ln w="12700">
-            <a:solidFill>
-              <a:srgbClr val="9E0F62">
-                <a:alpha val="0"/>
-              </a:srgbClr>
-            </a:solidFill>
-            <a:prstDash val="solid"/>
-          </a:ln>
-        </p:spPr>
-      </p:sp>
-      <p:sp>
-        <p:nvSpPr>
-          <p:cNvPr id="11" name="Shape 9"/>
-          <p:cNvSpPr/>
-          <p:nvPr/>
-        </p:nvSpPr>
-        <p:spPr>
-          <a:xfrm>
-            <a:off x="914400" y="4507992"/>
-            <a:ext cx="73152" cy="1024128"/>
+          <p:cNvPr id="9" name="Shape 7"/>
+          <p:cNvSpPr/>
+          <p:nvPr/>
+        </p:nvSpPr>
+        <p:spPr>
+          <a:xfrm>
+            <a:off x="6400800" y="1554480"/>
+            <a:ext cx="4937760" cy="73152"/>
           </a:xfrm>
           <a:prstGeom prst="rect">
             <a:avLst/>
@@ -14083,207 +13093,9 @@
           </a:ln>
         </p:spPr>
       </p:sp>
-      <p:pic>
-        <p:nvPicPr>
-          <p:cNvPr id="12" name="Image 0" descr="preencoded.png">    </p:cNvPr>
-          <p:cNvPicPr>
-            <a:picLocks noChangeAspect="1"/>
-          </p:cNvPicPr>
-          <p:nvPr/>
-        </p:nvPicPr>
-        <p:blipFill>
-          <a:blip r:embed="rId1">
-            <a:extLst>
-              <a:ext uri="{96DAC541-7B7A-43D3-8B79-37D633B846F1}">
-                <asvg:svgBlip xmlns:asvg="http://schemas.microsoft.com/office/drawing/2016/SVG/main" r:embed="rId2"/>
-              </a:ext>
-            </a:extLst>
-          </a:blip>
-          <a:stretch>
-            <a:fillRect/>
-          </a:stretch>
-        </p:blipFill>
-        <p:spPr>
-          <a:xfrm>
-            <a:off x="914400" y="1865376"/>
-            <a:ext cx="10241280" cy="1024128"/>
-          </a:xfrm>
-          <a:prstGeom prst="rect">
-            <a:avLst/>
-          </a:prstGeom>
-        </p:spPr>
-      </p:pic>
-      <p:sp>
-        <p:nvSpPr>
-          <p:cNvPr id="13" name="Shape 10"/>
-          <p:cNvSpPr/>
-          <p:nvPr/>
-        </p:nvSpPr>
-        <p:spPr>
-          <a:xfrm>
-            <a:off x="914400" y="1865376"/>
-            <a:ext cx="10241280" cy="1024128"/>
-          </a:xfrm>
-          <a:prstGeom prst="rect">
-            <a:avLst/>
-          </a:prstGeom>
-          <a:solidFill>
-            <a:srgbClr val="FBF8F3">
-              <a:alpha val="0"/>
-            </a:srgbClr>
-          </a:solidFill>
-          <a:ln w="12700">
-            <a:solidFill>
-              <a:srgbClr val="C6CCC9">
-                <a:alpha val="0"/>
-              </a:srgbClr>
-            </a:solidFill>
-            <a:prstDash val="solid"/>
-          </a:ln>
-          <a:effectLst>
-            <a:outerShdw sx="100000" sy="100000" kx="0" ky="0" algn="bl" rotWithShape="0" blurRad="12700" dist="50800" dir="2700000">
-              <a:srgbClr val="000000">
-                <a:alpha val="8000"/>
-              </a:srgbClr>
-            </a:outerShdw>
-          </a:effectLst>
-        </p:spPr>
-      </p:sp>
-      <p:pic>
-        <p:nvPicPr>
-          <p:cNvPr id="14" name="Image 1" descr="preencoded.png">    </p:cNvPr>
-          <p:cNvPicPr>
-            <a:picLocks noChangeAspect="1"/>
-          </p:cNvPicPr>
-          <p:nvPr/>
-        </p:nvPicPr>
-        <p:blipFill>
-          <a:blip r:embed="rId3">
-            <a:extLst>
-              <a:ext uri="{96DAC541-7B7A-43D3-8B79-37D633B846F1}">
-                <asvg:svgBlip xmlns:asvg="http://schemas.microsoft.com/office/drawing/2016/SVG/main" r:embed="rId4"/>
-              </a:ext>
-            </a:extLst>
-          </a:blip>
-          <a:stretch>
-            <a:fillRect/>
-          </a:stretch>
-        </p:blipFill>
-        <p:spPr>
-          <a:xfrm>
-            <a:off x="914400" y="3191256"/>
-            <a:ext cx="10241280" cy="1024128"/>
-          </a:xfrm>
-          <a:prstGeom prst="rect">
-            <a:avLst/>
-          </a:prstGeom>
-        </p:spPr>
-      </p:pic>
-      <p:sp>
-        <p:nvSpPr>
-          <p:cNvPr id="15" name="Shape 11"/>
-          <p:cNvSpPr/>
-          <p:nvPr/>
-        </p:nvSpPr>
-        <p:spPr>
-          <a:xfrm>
-            <a:off x="914400" y="3191256"/>
-            <a:ext cx="10241280" cy="1024128"/>
-          </a:xfrm>
-          <a:prstGeom prst="rect">
-            <a:avLst/>
-          </a:prstGeom>
-          <a:solidFill>
-            <a:srgbClr val="FBF8F3">
-              <a:alpha val="0"/>
-            </a:srgbClr>
-          </a:solidFill>
-          <a:ln w="12700">
-            <a:solidFill>
-              <a:srgbClr val="C6CCC9">
-                <a:alpha val="0"/>
-              </a:srgbClr>
-            </a:solidFill>
-            <a:prstDash val="solid"/>
-          </a:ln>
-          <a:effectLst>
-            <a:outerShdw sx="100000" sy="100000" kx="0" ky="0" algn="bl" rotWithShape="0" blurRad="12700" dist="50800" dir="2700000">
-              <a:srgbClr val="000000">
-                <a:alpha val="8000"/>
-              </a:srgbClr>
-            </a:outerShdw>
-          </a:effectLst>
-        </p:spPr>
-      </p:sp>
-      <p:pic>
-        <p:nvPicPr>
-          <p:cNvPr id="16" name="Image 2" descr="preencoded.png">    </p:cNvPr>
-          <p:cNvPicPr>
-            <a:picLocks noChangeAspect="1"/>
-          </p:cNvPicPr>
-          <p:nvPr/>
-        </p:nvPicPr>
-        <p:blipFill>
-          <a:blip r:embed="rId5">
-            <a:extLst>
-              <a:ext uri="{96DAC541-7B7A-43D3-8B79-37D633B846F1}">
-                <asvg:svgBlip xmlns:asvg="http://schemas.microsoft.com/office/drawing/2016/SVG/main" r:embed="rId6"/>
-              </a:ext>
-            </a:extLst>
-          </a:blip>
-          <a:stretch>
-            <a:fillRect/>
-          </a:stretch>
-        </p:blipFill>
-        <p:spPr>
-          <a:xfrm>
-            <a:off x="914400" y="4507992"/>
-            <a:ext cx="10241280" cy="1024128"/>
-          </a:xfrm>
-          <a:prstGeom prst="rect">
-            <a:avLst/>
-          </a:prstGeom>
-        </p:spPr>
-      </p:pic>
-      <p:sp>
-        <p:nvSpPr>
-          <p:cNvPr id="17" name="Shape 12"/>
-          <p:cNvSpPr/>
-          <p:nvPr/>
-        </p:nvSpPr>
-        <p:spPr>
-          <a:xfrm>
-            <a:off x="914400" y="4507992"/>
-            <a:ext cx="10241280" cy="1024128"/>
-          </a:xfrm>
-          <a:prstGeom prst="rect">
-            <a:avLst/>
-          </a:prstGeom>
-          <a:solidFill>
-            <a:srgbClr val="FBF8F3">
-              <a:alpha val="0"/>
-            </a:srgbClr>
-          </a:solidFill>
-          <a:ln w="12700">
-            <a:solidFill>
-              <a:srgbClr val="C6CCC9">
-                <a:alpha val="0"/>
-              </a:srgbClr>
-            </a:solidFill>
-            <a:prstDash val="solid"/>
-          </a:ln>
-          <a:effectLst>
-            <a:outerShdw sx="100000" sy="100000" kx="0" ky="0" algn="bl" rotWithShape="0" blurRad="12700" dist="50800" dir="2700000">
-              <a:srgbClr val="000000">
-                <a:alpha val="8000"/>
-              </a:srgbClr>
-            </a:outerShdw>
-          </a:effectLst>
-        </p:spPr>
-      </p:sp>
-      <p:sp>
-        <p:nvSpPr>
-          <p:cNvPr id="18" name="Text 13"/>
+      <p:sp>
+        <p:nvSpPr>
+          <p:cNvPr id="10" name="Text 8"/>
           <p:cNvSpPr txBox="1"/>
           <p:nvPr/>
         </p:nvSpPr>
@@ -14325,71 +13137,14 @@
       </p:sp>
       <p:sp>
         <p:nvSpPr>
-          <p:cNvPr id="19" name="Shape 14"/>
-          <p:cNvSpPr/>
-          <p:nvPr/>
-        </p:nvSpPr>
-        <p:spPr>
-          <a:xfrm>
-            <a:off x="1097280" y="2140428"/>
-            <a:ext cx="474025" cy="474025"/>
-          </a:xfrm>
-          <a:prstGeom prst="roundRect">
-            <a:avLst>
-              <a:gd name="adj" fmla="val 7716"/>
-            </a:avLst>
-          </a:prstGeom>
-          <a:solidFill>
-            <a:srgbClr val="F8F4EF"/>
-          </a:solidFill>
-          <a:ln w="12700">
-            <a:solidFill>
-              <a:srgbClr val="C6CCC9"/>
-            </a:solidFill>
-            <a:prstDash val="solid"/>
-          </a:ln>
-        </p:spPr>
-      </p:sp>
-      <p:pic>
-        <p:nvPicPr>
-          <p:cNvPr id="20" name="Image 3" descr="article icon from tabler-icons (MIT)">    </p:cNvPr>
-          <p:cNvPicPr>
-            <a:picLocks noChangeAspect="1"/>
-          </p:cNvPicPr>
-          <p:nvPr/>
-        </p:nvPicPr>
-        <p:blipFill>
-          <a:blip r:embed="rId7">
-            <a:extLst>
-              <a:ext uri="{96DAC541-7B7A-43D3-8B79-37D633B846F1}">
-                <asvg:svgBlip xmlns:asvg="http://schemas.microsoft.com/office/drawing/2016/SVG/main" r:embed="rId8"/>
-              </a:ext>
-            </a:extLst>
-          </a:blip>
-          <a:stretch>
-            <a:fillRect/>
-          </a:stretch>
-        </p:blipFill>
-        <p:spPr>
-          <a:xfrm>
-            <a:off x="1170432" y="2213580"/>
-            <a:ext cx="327721" cy="327721"/>
-          </a:xfrm>
-          <a:prstGeom prst="rect">
-            <a:avLst/>
-          </a:prstGeom>
-        </p:spPr>
-      </p:pic>
-      <p:sp>
-        <p:nvSpPr>
-          <p:cNvPr id="21" name="Text 15"/>
+          <p:cNvPr id="11" name="Text 9"/>
           <p:cNvSpPr txBox="1"/>
           <p:nvPr/>
         </p:nvSpPr>
         <p:spPr>
           <a:xfrm>
-            <a:off x="1699321" y="2164080"/>
-            <a:ext cx="9255191" cy="426720"/>
+            <a:off x="896112" y="3535680"/>
+            <a:ext cx="4791456" cy="426720"/>
           </a:xfrm>
           <a:prstGeom prst="rect">
             <a:avLst/>
@@ -14401,221 +13156,6 @@
           <a:bodyPr wrap="square" lIns="0" tIns="25400" rIns="25400" bIns="0" rtlCol="0" anchor="ctr"/>
           <a:lstStyle/>
           <a:p>
-            <a:pPr algn="ctr" indent="0" marL="0">
-              <a:lnSpc>
-                <a:spcPct val="120000"/>
-              </a:lnSpc>
-              <a:buNone/>
-            </a:pPr>
-            <a:r>
-              <a:rPr lang="en-US" sz="2200" dirty="0">
-                <a:solidFill>
-                  <a:srgbClr val="18181B"/>
-                </a:solidFill>
-                <a:latin typeface="Pretendard" pitchFamily="34" charset="0"/>
-                <a:ea typeface="Pretendard" pitchFamily="34" charset="-122"/>
-                <a:cs typeface="Pretendard" pitchFamily="34" charset="-120"/>
-              </a:rPr>
-              <a:t>Current project team members</a:t>
-            </a:r>
-            <a:endParaRPr lang="en-US" sz="2200" dirty="0"/>
-          </a:p>
-        </p:txBody>
-      </p:sp>
-      <p:sp>
-        <p:nvSpPr>
-          <p:cNvPr id="22" name="Shape 16"/>
-          <p:cNvSpPr/>
-          <p:nvPr/>
-        </p:nvSpPr>
-        <p:spPr>
-          <a:xfrm>
-            <a:off x="1097280" y="3466308"/>
-            <a:ext cx="474025" cy="474025"/>
-          </a:xfrm>
-          <a:prstGeom prst="roundRect">
-            <a:avLst>
-              <a:gd name="adj" fmla="val 7716"/>
-            </a:avLst>
-          </a:prstGeom>
-          <a:solidFill>
-            <a:srgbClr val="F8F4EF"/>
-          </a:solidFill>
-          <a:ln w="12700">
-            <a:solidFill>
-              <a:srgbClr val="C6CCC9"/>
-            </a:solidFill>
-            <a:prstDash val="solid"/>
-          </a:ln>
-        </p:spPr>
-      </p:sp>
-      <p:pic>
-        <p:nvPicPr>
-          <p:cNvPr id="23" name="Image 4" descr="github icon from simple-icons (CC0-1.0 with brand guidelines)">    </p:cNvPr>
-          <p:cNvPicPr>
-            <a:picLocks noChangeAspect="1"/>
-          </p:cNvPicPr>
-          <p:nvPr/>
-        </p:nvPicPr>
-        <p:blipFill>
-          <a:blip r:embed="rId9">
-            <a:extLst>
-              <a:ext uri="{96DAC541-7B7A-43D3-8B79-37D633B846F1}">
-                <asvg:svgBlip xmlns:asvg="http://schemas.microsoft.com/office/drawing/2016/SVG/main" r:embed="rId10"/>
-              </a:ext>
-            </a:extLst>
-          </a:blip>
-          <a:stretch>
-            <a:fillRect/>
-          </a:stretch>
-        </p:blipFill>
-        <p:spPr>
-          <a:xfrm>
-            <a:off x="1170432" y="3539460"/>
-            <a:ext cx="327721" cy="327721"/>
-          </a:xfrm>
-          <a:prstGeom prst="rect">
-            <a:avLst/>
-          </a:prstGeom>
-        </p:spPr>
-      </p:pic>
-      <p:sp>
-        <p:nvSpPr>
-          <p:cNvPr id="24" name="Text 17"/>
-          <p:cNvSpPr txBox="1"/>
-          <p:nvPr/>
-        </p:nvSpPr>
-        <p:spPr>
-          <a:xfrm>
-            <a:off x="1699321" y="3489960"/>
-            <a:ext cx="9255191" cy="426720"/>
-          </a:xfrm>
-          <a:prstGeom prst="rect">
-            <a:avLst/>
-          </a:prstGeom>
-          <a:noFill/>
-          <a:ln/>
-        </p:spPr>
-        <p:txBody>
-          <a:bodyPr wrap="square" lIns="0" tIns="25400" rIns="25400" bIns="0" rtlCol="0" anchor="ctr"/>
-          <a:lstStyle/>
-          <a:p>
-            <a:pPr algn="ctr" indent="0" marL="0">
-              <a:lnSpc>
-                <a:spcPct val="120000"/>
-              </a:lnSpc>
-              <a:buNone/>
-            </a:pPr>
-            <a:r>
-              <a:rPr lang="en-US" sz="2200" dirty="0">
-                <a:solidFill>
-                  <a:srgbClr val="18181B"/>
-                </a:solidFill>
-                <a:latin typeface="Pretendard" pitchFamily="34" charset="0"/>
-                <a:ea typeface="Pretendard" pitchFamily="34" charset="-122"/>
-                <a:cs typeface="Pretendard" pitchFamily="34" charset="-120"/>
-              </a:rPr>
-              <a:t>TSC (Technical Steering Committee)</a:t>
-            </a:r>
-            <a:endParaRPr lang="en-US" sz="2200" dirty="0"/>
-          </a:p>
-        </p:txBody>
-      </p:sp>
-      <p:sp>
-        <p:nvSpPr>
-          <p:cNvPr id="25" name="Shape 18"/>
-          <p:cNvSpPr/>
-          <p:nvPr/>
-        </p:nvSpPr>
-        <p:spPr>
-          <a:xfrm>
-            <a:off x="1097280" y="4783044"/>
-            <a:ext cx="474025" cy="474025"/>
-          </a:xfrm>
-          <a:prstGeom prst="roundRect">
-            <a:avLst>
-              <a:gd name="adj" fmla="val 7716"/>
-            </a:avLst>
-          </a:prstGeom>
-          <a:solidFill>
-            <a:srgbClr val="F8F4EF"/>
-          </a:solidFill>
-          <a:ln w="12700">
-            <a:solidFill>
-              <a:srgbClr val="C6CCC9"/>
-            </a:solidFill>
-            <a:prstDash val="solid"/>
-          </a:ln>
-        </p:spPr>
-      </p:sp>
-      <p:pic>
-        <p:nvPicPr>
-          <p:cNvPr id="26" name="Image 5" descr="code icon from tabler-icons (MIT)">    </p:cNvPr>
-          <p:cNvPicPr>
-            <a:picLocks noChangeAspect="1"/>
-          </p:cNvPicPr>
-          <p:nvPr/>
-        </p:nvPicPr>
-        <p:blipFill>
-          <a:blip r:embed="rId11">
-            <a:extLst>
-              <a:ext uri="{96DAC541-7B7A-43D3-8B79-37D633B846F1}">
-                <asvg:svgBlip xmlns:asvg="http://schemas.microsoft.com/office/drawing/2016/SVG/main" r:embed="rId12"/>
-              </a:ext>
-            </a:extLst>
-          </a:blip>
-          <a:stretch>
-            <a:fillRect/>
-          </a:stretch>
-        </p:blipFill>
-        <p:spPr>
-          <a:xfrm>
-            <a:off x="1170432" y="4856196"/>
-            <a:ext cx="327721" cy="327721"/>
-          </a:xfrm>
-          <a:prstGeom prst="rect">
-            <a:avLst/>
-          </a:prstGeom>
-        </p:spPr>
-      </p:pic>
-      <p:sp>
-        <p:nvSpPr>
-          <p:cNvPr id="27" name="Text 19"/>
-          <p:cNvSpPr txBox="1"/>
-          <p:nvPr/>
-        </p:nvSpPr>
-        <p:spPr>
-          <a:xfrm>
-            <a:off x="1699321" y="4600164"/>
-            <a:ext cx="9255191" cy="839785"/>
-          </a:xfrm>
-          <a:prstGeom prst="rect">
-            <a:avLst/>
-          </a:prstGeom>
-          <a:noFill/>
-          <a:ln/>
-        </p:spPr>
-        <p:txBody>
-          <a:bodyPr wrap="square" lIns="0" tIns="25400" rIns="25400" bIns="0" rtlCol="0" anchor="ctr"/>
-          <a:lstStyle/>
-          <a:p>
-            <a:pPr algn="l" indent="0" marL="0">
-              <a:lnSpc>
-                <a:spcPct val="120000"/>
-              </a:lnSpc>
-              <a:buNone/>
-            </a:pPr>
-            <a:r>
-              <a:rPr lang="en-US" sz="2200" b="1" dirty="0">
-                <a:solidFill>
-                  <a:srgbClr val="0F766E"/>
-                </a:solidFill>
-                <a:latin typeface="Pretendard" pitchFamily="34" charset="0"/>
-                <a:ea typeface="Pretendard" pitchFamily="34" charset="-122"/>
-                <a:cs typeface="Pretendard" pitchFamily="34" charset="-120"/>
-              </a:rPr>
-              <a:t>Current</a:t>
-            </a:r>
             <a:pPr algn="l" indent="0" marL="0">
               <a:lnSpc>
                 <a:spcPct val="120000"/>
@@ -14631,7 +13171,49 @@
                 <a:ea typeface="Pretendard" pitchFamily="34" charset="-122"/>
                 <a:cs typeface="Pretendard" pitchFamily="34" charset="-120"/>
               </a:rPr>
-              <a:t>  Under active development. Code for the Current release is in the</a:t>
+              <a:t>- Current project team members</a:t>
+            </a:r>
+            <a:endParaRPr lang="en-US" sz="2200" dirty="0"/>
+          </a:p>
+        </p:txBody>
+      </p:sp>
+      <p:sp>
+        <p:nvSpPr>
+          <p:cNvPr id="12" name="Text 10"/>
+          <p:cNvSpPr txBox="1"/>
+          <p:nvPr/>
+        </p:nvSpPr>
+        <p:spPr>
+          <a:xfrm>
+            <a:off x="6473952" y="3368040"/>
+            <a:ext cx="4791456" cy="762000"/>
+          </a:xfrm>
+          <a:prstGeom prst="rect">
+            <a:avLst/>
+          </a:prstGeom>
+          <a:noFill/>
+          <a:ln/>
+        </p:spPr>
+        <p:txBody>
+          <a:bodyPr wrap="square" lIns="0" tIns="25400" rIns="25400" bIns="0" rtlCol="0" anchor="ctr"/>
+          <a:lstStyle/>
+          <a:p>
+            <a:pPr algn="l" indent="0" marL="0">
+              <a:lnSpc>
+                <a:spcPct val="120000"/>
+              </a:lnSpc>
+              <a:buNone/>
+            </a:pPr>
+            <a:r>
+              <a:rPr lang="en-US" sz="2200" dirty="0">
+                <a:solidFill>
+                  <a:srgbClr val="18181B"/>
+                </a:solidFill>
+                <a:latin typeface="Pretendard" pitchFamily="34" charset="0"/>
+                <a:ea typeface="Pretendard" pitchFamily="34" charset="-122"/>
+                <a:cs typeface="Pretendard" pitchFamily="34" charset="-120"/>
+              </a:rPr>
+              <a:t>- TSC (Technical Steering Committee)</a:t>
             </a:r>
             <a:endParaRPr lang="en-US" sz="2200" dirty="0"/>
           </a:p>
@@ -15887,37 +14469,8 @@
         </p:nvSpPr>
         <p:spPr>
           <a:xfrm>
-            <a:off x="786384" y="1956816"/>
-            <a:ext cx="32004" cy="3483864"/>
-          </a:xfrm>
-          <a:prstGeom prst="rect">
-            <a:avLst/>
-          </a:prstGeom>
-          <a:solidFill>
-            <a:srgbClr val="9E0F62">
-              <a:alpha val="80000"/>
-            </a:srgbClr>
-          </a:solidFill>
-          <a:ln w="12700">
-            <a:solidFill>
-              <a:srgbClr val="9E0F62">
-                <a:alpha val="0"/>
-              </a:srgbClr>
-            </a:solidFill>
-            <a:prstDash val="solid"/>
-          </a:ln>
-        </p:spPr>
-      </p:sp>
-      <p:sp>
-        <p:nvSpPr>
-          <p:cNvPr id="9" name="Shape 7"/>
-          <p:cNvSpPr/>
-          <p:nvPr/>
-        </p:nvSpPr>
-        <p:spPr>
-          <a:xfrm>
-            <a:off x="914400" y="1865376"/>
-            <a:ext cx="73152" cy="1024128"/>
+            <a:off x="822960" y="1554480"/>
+            <a:ext cx="4937760" cy="73152"/>
           </a:xfrm>
           <a:prstGeom prst="rect">
             <a:avLst/>
@@ -15937,41 +14490,14 @@
       </p:sp>
       <p:sp>
         <p:nvSpPr>
-          <p:cNvPr id="10" name="Shape 8"/>
-          <p:cNvSpPr/>
-          <p:nvPr/>
-        </p:nvSpPr>
-        <p:spPr>
-          <a:xfrm>
-            <a:off x="914400" y="3191256"/>
-            <a:ext cx="73152" cy="1024128"/>
-          </a:xfrm>
-          <a:prstGeom prst="rect">
-            <a:avLst/>
-          </a:prstGeom>
-          <a:solidFill>
-            <a:srgbClr val="9E0F62"/>
-          </a:solidFill>
-          <a:ln w="12700">
-            <a:solidFill>
-              <a:srgbClr val="9E0F62">
-                <a:alpha val="0"/>
-              </a:srgbClr>
-            </a:solidFill>
-            <a:prstDash val="solid"/>
-          </a:ln>
-        </p:spPr>
-      </p:sp>
-      <p:sp>
-        <p:nvSpPr>
-          <p:cNvPr id="11" name="Shape 9"/>
-          <p:cNvSpPr/>
-          <p:nvPr/>
-        </p:nvSpPr>
-        <p:spPr>
-          <a:xfrm>
-            <a:off x="914400" y="4507992"/>
-            <a:ext cx="73152" cy="1024128"/>
+          <p:cNvPr id="9" name="Shape 7"/>
+          <p:cNvSpPr/>
+          <p:nvPr/>
+        </p:nvSpPr>
+        <p:spPr>
+          <a:xfrm>
+            <a:off x="6400800" y="1554480"/>
+            <a:ext cx="4937760" cy="73152"/>
           </a:xfrm>
           <a:prstGeom prst="rect">
             <a:avLst/>
@@ -15989,207 +14515,9 @@
           </a:ln>
         </p:spPr>
       </p:sp>
-      <p:pic>
-        <p:nvPicPr>
-          <p:cNvPr id="12" name="Image 0" descr="preencoded.png">    </p:cNvPr>
-          <p:cNvPicPr>
-            <a:picLocks noChangeAspect="1"/>
-          </p:cNvPicPr>
-          <p:nvPr/>
-        </p:nvPicPr>
-        <p:blipFill>
-          <a:blip r:embed="rId1">
-            <a:extLst>
-              <a:ext uri="{96DAC541-7B7A-43D3-8B79-37D633B846F1}">
-                <asvg:svgBlip xmlns:asvg="http://schemas.microsoft.com/office/drawing/2016/SVG/main" r:embed="rId2"/>
-              </a:ext>
-            </a:extLst>
-          </a:blip>
-          <a:stretch>
-            <a:fillRect/>
-          </a:stretch>
-        </p:blipFill>
-        <p:spPr>
-          <a:xfrm>
-            <a:off x="914400" y="1865376"/>
-            <a:ext cx="10241280" cy="1024128"/>
-          </a:xfrm>
-          <a:prstGeom prst="rect">
-            <a:avLst/>
-          </a:prstGeom>
-        </p:spPr>
-      </p:pic>
-      <p:sp>
-        <p:nvSpPr>
-          <p:cNvPr id="13" name="Shape 10"/>
-          <p:cNvSpPr/>
-          <p:nvPr/>
-        </p:nvSpPr>
-        <p:spPr>
-          <a:xfrm>
-            <a:off x="914400" y="1865376"/>
-            <a:ext cx="10241280" cy="1024128"/>
-          </a:xfrm>
-          <a:prstGeom prst="rect">
-            <a:avLst/>
-          </a:prstGeom>
-          <a:solidFill>
-            <a:srgbClr val="FBF8F3">
-              <a:alpha val="0"/>
-            </a:srgbClr>
-          </a:solidFill>
-          <a:ln w="12700">
-            <a:solidFill>
-              <a:srgbClr val="C6CCC9">
-                <a:alpha val="0"/>
-              </a:srgbClr>
-            </a:solidFill>
-            <a:prstDash val="solid"/>
-          </a:ln>
-          <a:effectLst>
-            <a:outerShdw sx="100000" sy="100000" kx="0" ky="0" algn="bl" rotWithShape="0" blurRad="12700" dist="50800" dir="2700000">
-              <a:srgbClr val="000000">
-                <a:alpha val="8000"/>
-              </a:srgbClr>
-            </a:outerShdw>
-          </a:effectLst>
-        </p:spPr>
-      </p:sp>
-      <p:pic>
-        <p:nvPicPr>
-          <p:cNvPr id="14" name="Image 1" descr="preencoded.png">    </p:cNvPr>
-          <p:cNvPicPr>
-            <a:picLocks noChangeAspect="1"/>
-          </p:cNvPicPr>
-          <p:nvPr/>
-        </p:nvPicPr>
-        <p:blipFill>
-          <a:blip r:embed="rId3">
-            <a:extLst>
-              <a:ext uri="{96DAC541-7B7A-43D3-8B79-37D633B846F1}">
-                <asvg:svgBlip xmlns:asvg="http://schemas.microsoft.com/office/drawing/2016/SVG/main" r:embed="rId4"/>
-              </a:ext>
-            </a:extLst>
-          </a:blip>
-          <a:stretch>
-            <a:fillRect/>
-          </a:stretch>
-        </p:blipFill>
-        <p:spPr>
-          <a:xfrm>
-            <a:off x="914400" y="3191256"/>
-            <a:ext cx="10241280" cy="1024128"/>
-          </a:xfrm>
-          <a:prstGeom prst="rect">
-            <a:avLst/>
-          </a:prstGeom>
-        </p:spPr>
-      </p:pic>
-      <p:sp>
-        <p:nvSpPr>
-          <p:cNvPr id="15" name="Shape 11"/>
-          <p:cNvSpPr/>
-          <p:nvPr/>
-        </p:nvSpPr>
-        <p:spPr>
-          <a:xfrm>
-            <a:off x="914400" y="3191256"/>
-            <a:ext cx="10241280" cy="1024128"/>
-          </a:xfrm>
-          <a:prstGeom prst="rect">
-            <a:avLst/>
-          </a:prstGeom>
-          <a:solidFill>
-            <a:srgbClr val="FBF8F3">
-              <a:alpha val="0"/>
-            </a:srgbClr>
-          </a:solidFill>
-          <a:ln w="12700">
-            <a:solidFill>
-              <a:srgbClr val="C6CCC9">
-                <a:alpha val="0"/>
-              </a:srgbClr>
-            </a:solidFill>
-            <a:prstDash val="solid"/>
-          </a:ln>
-          <a:effectLst>
-            <a:outerShdw sx="100000" sy="100000" kx="0" ky="0" algn="bl" rotWithShape="0" blurRad="12700" dist="50800" dir="2700000">
-              <a:srgbClr val="000000">
-                <a:alpha val="8000"/>
-              </a:srgbClr>
-            </a:outerShdw>
-          </a:effectLst>
-        </p:spPr>
-      </p:sp>
-      <p:pic>
-        <p:nvPicPr>
-          <p:cNvPr id="16" name="Image 2" descr="preencoded.png">    </p:cNvPr>
-          <p:cNvPicPr>
-            <a:picLocks noChangeAspect="1"/>
-          </p:cNvPicPr>
-          <p:nvPr/>
-        </p:nvPicPr>
-        <p:blipFill>
-          <a:blip r:embed="rId5">
-            <a:extLst>
-              <a:ext uri="{96DAC541-7B7A-43D3-8B79-37D633B846F1}">
-                <asvg:svgBlip xmlns:asvg="http://schemas.microsoft.com/office/drawing/2016/SVG/main" r:embed="rId6"/>
-              </a:ext>
-            </a:extLst>
-          </a:blip>
-          <a:stretch>
-            <a:fillRect/>
-          </a:stretch>
-        </p:blipFill>
-        <p:spPr>
-          <a:xfrm>
-            <a:off x="914400" y="4507992"/>
-            <a:ext cx="10241280" cy="1024128"/>
-          </a:xfrm>
-          <a:prstGeom prst="rect">
-            <a:avLst/>
-          </a:prstGeom>
-        </p:spPr>
-      </p:pic>
-      <p:sp>
-        <p:nvSpPr>
-          <p:cNvPr id="17" name="Shape 12"/>
-          <p:cNvSpPr/>
-          <p:nvPr/>
-        </p:nvSpPr>
-        <p:spPr>
-          <a:xfrm>
-            <a:off x="914400" y="4507992"/>
-            <a:ext cx="10241280" cy="1024128"/>
-          </a:xfrm>
-          <a:prstGeom prst="rect">
-            <a:avLst/>
-          </a:prstGeom>
-          <a:solidFill>
-            <a:srgbClr val="FBF8F3">
-              <a:alpha val="0"/>
-            </a:srgbClr>
-          </a:solidFill>
-          <a:ln w="12700">
-            <a:solidFill>
-              <a:srgbClr val="C6CCC9">
-                <a:alpha val="0"/>
-              </a:srgbClr>
-            </a:solidFill>
-            <a:prstDash val="solid"/>
-          </a:ln>
-          <a:effectLst>
-            <a:outerShdw sx="100000" sy="100000" kx="0" ky="0" algn="bl" rotWithShape="0" blurRad="12700" dist="50800" dir="2700000">
-              <a:srgbClr val="000000">
-                <a:alpha val="8000"/>
-              </a:srgbClr>
-            </a:outerShdw>
-          </a:effectLst>
-        </p:spPr>
-      </p:sp>
-      <p:sp>
-        <p:nvSpPr>
-          <p:cNvPr id="18" name="Text 13"/>
+      <p:sp>
+        <p:nvSpPr>
+          <p:cNvPr id="10" name="Text 8"/>
           <p:cNvSpPr txBox="1"/>
           <p:nvPr/>
         </p:nvSpPr>
@@ -16231,71 +14559,14 @@
       </p:sp>
       <p:sp>
         <p:nvSpPr>
-          <p:cNvPr id="19" name="Shape 14"/>
-          <p:cNvSpPr/>
-          <p:nvPr/>
-        </p:nvSpPr>
-        <p:spPr>
-          <a:xfrm>
-            <a:off x="1097280" y="2140428"/>
-            <a:ext cx="474025" cy="474025"/>
-          </a:xfrm>
-          <a:prstGeom prst="roundRect">
-            <a:avLst>
-              <a:gd name="adj" fmla="val 7716"/>
-            </a:avLst>
-          </a:prstGeom>
-          <a:solidFill>
-            <a:srgbClr val="F8F4EF"/>
-          </a:solidFill>
-          <a:ln w="12700">
-            <a:solidFill>
-              <a:srgbClr val="C6CCC9"/>
-            </a:solidFill>
-            <a:prstDash val="solid"/>
-          </a:ln>
-        </p:spPr>
-      </p:sp>
-      <p:pic>
-        <p:nvPicPr>
-          <p:cNvPr id="20" name="Image 3" descr="article icon from tabler-icons (MIT)">    </p:cNvPr>
-          <p:cNvPicPr>
-            <a:picLocks noChangeAspect="1"/>
-          </p:cNvPicPr>
-          <p:nvPr/>
-        </p:nvPicPr>
-        <p:blipFill>
-          <a:blip r:embed="rId7">
-            <a:extLst>
-              <a:ext uri="{96DAC541-7B7A-43D3-8B79-37D633B846F1}">
-                <asvg:svgBlip xmlns:asvg="http://schemas.microsoft.com/office/drawing/2016/SVG/main" r:embed="rId8"/>
-              </a:ext>
-            </a:extLst>
-          </a:blip>
-          <a:stretch>
-            <a:fillRect/>
-          </a:stretch>
-        </p:blipFill>
-        <p:spPr>
-          <a:xfrm>
-            <a:off x="1170432" y="2213580"/>
-            <a:ext cx="327721" cy="327721"/>
-          </a:xfrm>
-          <a:prstGeom prst="rect">
-            <a:avLst/>
-          </a:prstGeom>
-        </p:spPr>
-      </p:pic>
-      <p:sp>
-        <p:nvSpPr>
-          <p:cNvPr id="21" name="Text 15"/>
+          <p:cNvPr id="11" name="Text 9"/>
           <p:cNvSpPr txBox="1"/>
           <p:nvPr/>
         </p:nvSpPr>
         <p:spPr>
           <a:xfrm>
-            <a:off x="1699321" y="2164080"/>
-            <a:ext cx="9255191" cy="426720"/>
+            <a:off x="896112" y="3535680"/>
+            <a:ext cx="4791456" cy="426720"/>
           </a:xfrm>
           <a:prstGeom prst="rect">
             <a:avLst/>
@@ -16307,7 +14578,7 @@
           <a:bodyPr wrap="square" lIns="0" tIns="25400" rIns="25400" bIns="0" rtlCol="0" anchor="ctr"/>
           <a:lstStyle/>
           <a:p>
-            <a:pPr algn="ctr" indent="0" marL="0">
+            <a:pPr algn="l" indent="0" marL="0">
               <a:lnSpc>
                 <a:spcPct val="120000"/>
               </a:lnSpc>
@@ -16322,7 +14593,7 @@
                 <a:ea typeface="Pretendard" pitchFamily="34" charset="-122"/>
                 <a:cs typeface="Pretendard" pitchFamily="34" charset="-120"/>
               </a:rPr>
-              <a:t>Focus on high performance</a:t>
+              <a:t>- Focus on high performance</a:t>
             </a:r>
             <a:endParaRPr lang="en-US" sz="2200" dirty="0"/>
           </a:p>
@@ -16330,71 +14601,14 @@
       </p:sp>
       <p:sp>
         <p:nvSpPr>
-          <p:cNvPr id="22" name="Shape 16"/>
-          <p:cNvSpPr/>
-          <p:nvPr/>
-        </p:nvSpPr>
-        <p:spPr>
-          <a:xfrm>
-            <a:off x="1097280" y="3466308"/>
-            <a:ext cx="474025" cy="474025"/>
-          </a:xfrm>
-          <a:prstGeom prst="roundRect">
-            <a:avLst>
-              <a:gd name="adj" fmla="val 7716"/>
-            </a:avLst>
-          </a:prstGeom>
-          <a:solidFill>
-            <a:srgbClr val="F8F4EF"/>
-          </a:solidFill>
-          <a:ln w="12700">
-            <a:solidFill>
-              <a:srgbClr val="C6CCC9"/>
-            </a:solidFill>
-            <a:prstDash val="solid"/>
-          </a:ln>
-        </p:spPr>
-      </p:sp>
-      <p:pic>
-        <p:nvPicPr>
-          <p:cNvPr id="23" name="Image 4" descr="verified icon from tabler-icons (MIT)">    </p:cNvPr>
-          <p:cNvPicPr>
-            <a:picLocks noChangeAspect="1"/>
-          </p:cNvPicPr>
-          <p:nvPr/>
-        </p:nvPicPr>
-        <p:blipFill>
-          <a:blip r:embed="rId9">
-            <a:extLst>
-              <a:ext uri="{96DAC541-7B7A-43D3-8B79-37D633B846F1}">
-                <asvg:svgBlip xmlns:asvg="http://schemas.microsoft.com/office/drawing/2016/SVG/main" r:embed="rId10"/>
-              </a:ext>
-            </a:extLst>
-          </a:blip>
-          <a:stretch>
-            <a:fillRect/>
-          </a:stretch>
-        </p:blipFill>
-        <p:spPr>
-          <a:xfrm>
-            <a:off x="1170432" y="3539460"/>
-            <a:ext cx="327721" cy="327721"/>
-          </a:xfrm>
-          <a:prstGeom prst="rect">
-            <a:avLst/>
-          </a:prstGeom>
-        </p:spPr>
-      </p:pic>
-      <p:sp>
-        <p:nvSpPr>
-          <p:cNvPr id="24" name="Text 17"/>
+          <p:cNvPr id="12" name="Text 10"/>
           <p:cNvSpPr txBox="1"/>
           <p:nvPr/>
         </p:nvSpPr>
         <p:spPr>
           <a:xfrm>
-            <a:off x="1699321" y="3489960"/>
-            <a:ext cx="9255191" cy="426720"/>
+            <a:off x="6473952" y="3535680"/>
+            <a:ext cx="4791456" cy="426720"/>
           </a:xfrm>
           <a:prstGeom prst="rect">
             <a:avLst/>
@@ -16406,7 +14620,7 @@
           <a:bodyPr wrap="square" lIns="0" tIns="25400" rIns="25400" bIns="0" rtlCol="0" anchor="ctr"/>
           <a:lstStyle/>
           <a:p>
-            <a:pPr algn="ctr" indent="0" marL="0">
+            <a:pPr algn="l" indent="0" marL="0">
               <a:lnSpc>
                 <a:spcPct val="120000"/>
               </a:lnSpc>
@@ -16421,106 +14635,7 @@
                 <a:ea typeface="Pretendard" pitchFamily="34" charset="-122"/>
                 <a:cs typeface="Pretendard" pitchFamily="34" charset="-120"/>
               </a:rPr>
-              <a:t>Super-high test coverage</a:t>
-            </a:r>
-            <a:endParaRPr lang="en-US" sz="2200" dirty="0"/>
-          </a:p>
-        </p:txBody>
-      </p:sp>
-      <p:sp>
-        <p:nvSpPr>
-          <p:cNvPr id="25" name="Shape 18"/>
-          <p:cNvSpPr/>
-          <p:nvPr/>
-        </p:nvSpPr>
-        <p:spPr>
-          <a:xfrm>
-            <a:off x="1097280" y="4783044"/>
-            <a:ext cx="474025" cy="474025"/>
-          </a:xfrm>
-          <a:prstGeom prst="roundRect">
-            <a:avLst>
-              <a:gd name="adj" fmla="val 7716"/>
-            </a:avLst>
-          </a:prstGeom>
-          <a:solidFill>
-            <a:srgbClr val="F8F4EF"/>
-          </a:solidFill>
-          <a:ln w="12700">
-            <a:solidFill>
-              <a:srgbClr val="C6CCC9"/>
-            </a:solidFill>
-            <a:prstDash val="solid"/>
-          </a:ln>
-        </p:spPr>
-      </p:sp>
-      <p:pic>
-        <p:nvPicPr>
-          <p:cNvPr id="26" name="Image 5" descr="server icon from svgrepo (open-license catalog pattern)">    </p:cNvPr>
-          <p:cNvPicPr>
-            <a:picLocks noChangeAspect="1"/>
-          </p:cNvPicPr>
-          <p:nvPr/>
-        </p:nvPicPr>
-        <p:blipFill>
-          <a:blip r:embed="rId11">
-            <a:extLst>
-              <a:ext uri="{96DAC541-7B7A-43D3-8B79-37D633B846F1}">
-                <asvg:svgBlip xmlns:asvg="http://schemas.microsoft.com/office/drawing/2016/SVG/main" r:embed="rId12"/>
-              </a:ext>
-            </a:extLst>
-          </a:blip>
-          <a:stretch>
-            <a:fillRect/>
-          </a:stretch>
-        </p:blipFill>
-        <p:spPr>
-          <a:xfrm>
-            <a:off x="1170432" y="4856196"/>
-            <a:ext cx="327721" cy="327721"/>
-          </a:xfrm>
-          <a:prstGeom prst="rect">
-            <a:avLst/>
-          </a:prstGeom>
-        </p:spPr>
-      </p:pic>
-      <p:sp>
-        <p:nvSpPr>
-          <p:cNvPr id="27" name="Text 19"/>
-          <p:cNvSpPr txBox="1"/>
-          <p:nvPr/>
-        </p:nvSpPr>
-        <p:spPr>
-          <a:xfrm>
-            <a:off x="1699321" y="4806696"/>
-            <a:ext cx="9255191" cy="426720"/>
-          </a:xfrm>
-          <a:prstGeom prst="rect">
-            <a:avLst/>
-          </a:prstGeom>
-          <a:noFill/>
-          <a:ln/>
-        </p:spPr>
-        <p:txBody>
-          <a:bodyPr wrap="square" lIns="0" tIns="25400" rIns="25400" bIns="0" rtlCol="0" anchor="ctr"/>
-          <a:lstStyle/>
-          <a:p>
-            <a:pPr algn="ctr" indent="0" marL="0">
-              <a:lnSpc>
-                <a:spcPct val="120000"/>
-              </a:lnSpc>
-              <a:buNone/>
-            </a:pPr>
-            <a:r>
-              <a:rPr lang="en-US" sz="2200" dirty="0">
-                <a:solidFill>
-                  <a:srgbClr val="18181B"/>
-                </a:solidFill>
-                <a:latin typeface="Pretendard" pitchFamily="34" charset="0"/>
-                <a:ea typeface="Pretendard" pitchFamily="34" charset="-122"/>
-                <a:cs typeface="Pretendard" pitchFamily="34" charset="-120"/>
-              </a:rPr>
-              <a:t>View system supporting 14+ template engines</a:t>
+              <a:t>- Super-high test coverage</a:t>
             </a:r>
             <a:endParaRPr lang="en-US" sz="2200" dirty="0"/>
           </a:p>
@@ -17810,37 +15925,8 @@
         </p:nvSpPr>
         <p:spPr>
           <a:xfrm>
-            <a:off x="786384" y="1956816"/>
-            <a:ext cx="32004" cy="3483864"/>
-          </a:xfrm>
-          <a:prstGeom prst="rect">
-            <a:avLst/>
-          </a:prstGeom>
-          <a:solidFill>
-            <a:srgbClr val="9E0F62">
-              <a:alpha val="80000"/>
-            </a:srgbClr>
-          </a:solidFill>
-          <a:ln w="12700">
-            <a:solidFill>
-              <a:srgbClr val="9E0F62">
-                <a:alpha val="0"/>
-              </a:srgbClr>
-            </a:solidFill>
-            <a:prstDash val="solid"/>
-          </a:ln>
-        </p:spPr>
-      </p:sp>
-      <p:sp>
-        <p:nvSpPr>
-          <p:cNvPr id="9" name="Shape 7"/>
-          <p:cNvSpPr/>
-          <p:nvPr/>
-        </p:nvSpPr>
-        <p:spPr>
-          <a:xfrm>
-            <a:off x="914400" y="1865376"/>
-            <a:ext cx="73152" cy="1024128"/>
+            <a:off x="822960" y="1554480"/>
+            <a:ext cx="4937760" cy="73152"/>
           </a:xfrm>
           <a:prstGeom prst="rect">
             <a:avLst/>
@@ -17860,41 +15946,14 @@
       </p:sp>
       <p:sp>
         <p:nvSpPr>
-          <p:cNvPr id="10" name="Shape 8"/>
-          <p:cNvSpPr/>
-          <p:nvPr/>
-        </p:nvSpPr>
-        <p:spPr>
-          <a:xfrm>
-            <a:off x="914400" y="3191256"/>
-            <a:ext cx="73152" cy="1024128"/>
-          </a:xfrm>
-          <a:prstGeom prst="rect">
-            <a:avLst/>
-          </a:prstGeom>
-          <a:solidFill>
-            <a:srgbClr val="9E0F62"/>
-          </a:solidFill>
-          <a:ln w="12700">
-            <a:solidFill>
-              <a:srgbClr val="9E0F62">
-                <a:alpha val="0"/>
-              </a:srgbClr>
-            </a:solidFill>
-            <a:prstDash val="solid"/>
-          </a:ln>
-        </p:spPr>
-      </p:sp>
-      <p:sp>
-        <p:nvSpPr>
-          <p:cNvPr id="11" name="Shape 9"/>
-          <p:cNvSpPr/>
-          <p:nvPr/>
-        </p:nvSpPr>
-        <p:spPr>
-          <a:xfrm>
-            <a:off x="914400" y="4507992"/>
-            <a:ext cx="73152" cy="1024128"/>
+          <p:cNvPr id="9" name="Shape 7"/>
+          <p:cNvSpPr/>
+          <p:nvPr/>
+        </p:nvSpPr>
+        <p:spPr>
+          <a:xfrm>
+            <a:off x="6400800" y="1554480"/>
+            <a:ext cx="4937760" cy="73152"/>
           </a:xfrm>
           <a:prstGeom prst="rect">
             <a:avLst/>
@@ -17912,207 +15971,9 @@
           </a:ln>
         </p:spPr>
       </p:sp>
-      <p:pic>
-        <p:nvPicPr>
-          <p:cNvPr id="12" name="Image 0" descr="preencoded.png">    </p:cNvPr>
-          <p:cNvPicPr>
-            <a:picLocks noChangeAspect="1"/>
-          </p:cNvPicPr>
-          <p:nvPr/>
-        </p:nvPicPr>
-        <p:blipFill>
-          <a:blip r:embed="rId1">
-            <a:extLst>
-              <a:ext uri="{96DAC541-7B7A-43D3-8B79-37D633B846F1}">
-                <asvg:svgBlip xmlns:asvg="http://schemas.microsoft.com/office/drawing/2016/SVG/main" r:embed="rId2"/>
-              </a:ext>
-            </a:extLst>
-          </a:blip>
-          <a:stretch>
-            <a:fillRect/>
-          </a:stretch>
-        </p:blipFill>
-        <p:spPr>
-          <a:xfrm>
-            <a:off x="914400" y="1865376"/>
-            <a:ext cx="10241280" cy="1024128"/>
-          </a:xfrm>
-          <a:prstGeom prst="rect">
-            <a:avLst/>
-          </a:prstGeom>
-        </p:spPr>
-      </p:pic>
-      <p:sp>
-        <p:nvSpPr>
-          <p:cNvPr id="13" name="Shape 10"/>
-          <p:cNvSpPr/>
-          <p:nvPr/>
-        </p:nvSpPr>
-        <p:spPr>
-          <a:xfrm>
-            <a:off x="914400" y="1865376"/>
-            <a:ext cx="10241280" cy="1024128"/>
-          </a:xfrm>
-          <a:prstGeom prst="rect">
-            <a:avLst/>
-          </a:prstGeom>
-          <a:solidFill>
-            <a:srgbClr val="FBF8F3">
-              <a:alpha val="0"/>
-            </a:srgbClr>
-          </a:solidFill>
-          <a:ln w="12700">
-            <a:solidFill>
-              <a:srgbClr val="C6CCC9">
-                <a:alpha val="0"/>
-              </a:srgbClr>
-            </a:solidFill>
-            <a:prstDash val="solid"/>
-          </a:ln>
-          <a:effectLst>
-            <a:outerShdw sx="100000" sy="100000" kx="0" ky="0" algn="bl" rotWithShape="0" blurRad="12700" dist="50800" dir="2700000">
-              <a:srgbClr val="000000">
-                <a:alpha val="8000"/>
-              </a:srgbClr>
-            </a:outerShdw>
-          </a:effectLst>
-        </p:spPr>
-      </p:sp>
-      <p:pic>
-        <p:nvPicPr>
-          <p:cNvPr id="14" name="Image 1" descr="preencoded.png">    </p:cNvPr>
-          <p:cNvPicPr>
-            <a:picLocks noChangeAspect="1"/>
-          </p:cNvPicPr>
-          <p:nvPr/>
-        </p:nvPicPr>
-        <p:blipFill>
-          <a:blip r:embed="rId3">
-            <a:extLst>
-              <a:ext uri="{96DAC541-7B7A-43D3-8B79-37D633B846F1}">
-                <asvg:svgBlip xmlns:asvg="http://schemas.microsoft.com/office/drawing/2016/SVG/main" r:embed="rId4"/>
-              </a:ext>
-            </a:extLst>
-          </a:blip>
-          <a:stretch>
-            <a:fillRect/>
-          </a:stretch>
-        </p:blipFill>
-        <p:spPr>
-          <a:xfrm>
-            <a:off x="914400" y="3191256"/>
-            <a:ext cx="10241280" cy="1024128"/>
-          </a:xfrm>
-          <a:prstGeom prst="rect">
-            <a:avLst/>
-          </a:prstGeom>
-        </p:spPr>
-      </p:pic>
-      <p:sp>
-        <p:nvSpPr>
-          <p:cNvPr id="15" name="Shape 11"/>
-          <p:cNvSpPr/>
-          <p:nvPr/>
-        </p:nvSpPr>
-        <p:spPr>
-          <a:xfrm>
-            <a:off x="914400" y="3191256"/>
-            <a:ext cx="10241280" cy="1024128"/>
-          </a:xfrm>
-          <a:prstGeom prst="rect">
-            <a:avLst/>
-          </a:prstGeom>
-          <a:solidFill>
-            <a:srgbClr val="FBF8F3">
-              <a:alpha val="0"/>
-            </a:srgbClr>
-          </a:solidFill>
-          <a:ln w="12700">
-            <a:solidFill>
-              <a:srgbClr val="C6CCC9">
-                <a:alpha val="0"/>
-              </a:srgbClr>
-            </a:solidFill>
-            <a:prstDash val="solid"/>
-          </a:ln>
-          <a:effectLst>
-            <a:outerShdw sx="100000" sy="100000" kx="0" ky="0" algn="bl" rotWithShape="0" blurRad="12700" dist="50800" dir="2700000">
-              <a:srgbClr val="000000">
-                <a:alpha val="8000"/>
-              </a:srgbClr>
-            </a:outerShdw>
-          </a:effectLst>
-        </p:spPr>
-      </p:sp>
-      <p:pic>
-        <p:nvPicPr>
-          <p:cNvPr id="16" name="Image 2" descr="preencoded.png">    </p:cNvPr>
-          <p:cNvPicPr>
-            <a:picLocks noChangeAspect="1"/>
-          </p:cNvPicPr>
-          <p:nvPr/>
-        </p:nvPicPr>
-        <p:blipFill>
-          <a:blip r:embed="rId5">
-            <a:extLst>
-              <a:ext uri="{96DAC541-7B7A-43D3-8B79-37D633B846F1}">
-                <asvg:svgBlip xmlns:asvg="http://schemas.microsoft.com/office/drawing/2016/SVG/main" r:embed="rId6"/>
-              </a:ext>
-            </a:extLst>
-          </a:blip>
-          <a:stretch>
-            <a:fillRect/>
-          </a:stretch>
-        </p:blipFill>
-        <p:spPr>
-          <a:xfrm>
-            <a:off x="914400" y="4507992"/>
-            <a:ext cx="10241280" cy="1024128"/>
-          </a:xfrm>
-          <a:prstGeom prst="rect">
-            <a:avLst/>
-          </a:prstGeom>
-        </p:spPr>
-      </p:pic>
-      <p:sp>
-        <p:nvSpPr>
-          <p:cNvPr id="17" name="Shape 12"/>
-          <p:cNvSpPr/>
-          <p:nvPr/>
-        </p:nvSpPr>
-        <p:spPr>
-          <a:xfrm>
-            <a:off x="914400" y="4507992"/>
-            <a:ext cx="10241280" cy="1024128"/>
-          </a:xfrm>
-          <a:prstGeom prst="rect">
-            <a:avLst/>
-          </a:prstGeom>
-          <a:solidFill>
-            <a:srgbClr val="FBF8F3">
-              <a:alpha val="0"/>
-            </a:srgbClr>
-          </a:solidFill>
-          <a:ln w="12700">
-            <a:solidFill>
-              <a:srgbClr val="C6CCC9">
-                <a:alpha val="0"/>
-              </a:srgbClr>
-            </a:solidFill>
-            <a:prstDash val="solid"/>
-          </a:ln>
-          <a:effectLst>
-            <a:outerShdw sx="100000" sy="100000" kx="0" ky="0" algn="bl" rotWithShape="0" blurRad="12700" dist="50800" dir="2700000">
-              <a:srgbClr val="000000">
-                <a:alpha val="8000"/>
-              </a:srgbClr>
-            </a:outerShdw>
-          </a:effectLst>
-        </p:spPr>
-      </p:sp>
-      <p:sp>
-        <p:nvSpPr>
-          <p:cNvPr id="18" name="Text 13"/>
+      <p:sp>
+        <p:nvSpPr>
+          <p:cNvPr id="10" name="Text 8"/>
           <p:cNvSpPr txBox="1"/>
           <p:nvPr/>
         </p:nvSpPr>
@@ -18154,71 +16015,14 @@
       </p:sp>
       <p:sp>
         <p:nvSpPr>
-          <p:cNvPr id="19" name="Shape 14"/>
-          <p:cNvSpPr/>
-          <p:nvPr/>
-        </p:nvSpPr>
-        <p:spPr>
-          <a:xfrm>
-            <a:off x="1097280" y="2140428"/>
-            <a:ext cx="474025" cy="474025"/>
-          </a:xfrm>
-          <a:prstGeom prst="roundRect">
-            <a:avLst>
-              <a:gd name="adj" fmla="val 7716"/>
-            </a:avLst>
-          </a:prstGeom>
-          <a:solidFill>
-            <a:srgbClr val="F8F4EF"/>
-          </a:solidFill>
-          <a:ln w="12700">
-            <a:solidFill>
-              <a:srgbClr val="C6CCC9"/>
-            </a:solidFill>
-            <a:prstDash val="solid"/>
-          </a:ln>
-        </p:spPr>
-      </p:sp>
-      <p:pic>
-        <p:nvPicPr>
-          <p:cNvPr id="20" name="Image 3" descr="article icon from tabler-icons (MIT)">    </p:cNvPr>
-          <p:cNvPicPr>
-            <a:picLocks noChangeAspect="1"/>
-          </p:cNvPicPr>
-          <p:nvPr/>
-        </p:nvPicPr>
-        <p:blipFill>
-          <a:blip r:embed="rId7">
-            <a:extLst>
-              <a:ext uri="{96DAC541-7B7A-43D3-8B79-37D633B846F1}">
-                <asvg:svgBlip xmlns:asvg="http://schemas.microsoft.com/office/drawing/2016/SVG/main" r:embed="rId8"/>
-              </a:ext>
-            </a:extLst>
-          </a:blip>
-          <a:stretch>
-            <a:fillRect/>
-          </a:stretch>
-        </p:blipFill>
-        <p:spPr>
-          <a:xfrm>
-            <a:off x="1170432" y="2213580"/>
-            <a:ext cx="327721" cy="327721"/>
-          </a:xfrm>
-          <a:prstGeom prst="rect">
-            <a:avLst/>
-          </a:prstGeom>
-        </p:spPr>
-      </p:pic>
-      <p:sp>
-        <p:nvSpPr>
-          <p:cNvPr id="21" name="Text 15"/>
+          <p:cNvPr id="11" name="Text 9"/>
           <p:cNvSpPr txBox="1"/>
           <p:nvPr/>
         </p:nvSpPr>
         <p:spPr>
           <a:xfrm>
-            <a:off x="1699321" y="1957548"/>
-            <a:ext cx="9255191" cy="839785"/>
+            <a:off x="896112" y="1664208"/>
+            <a:ext cx="4791456" cy="4169664"/>
           </a:xfrm>
           <a:prstGeom prst="rect">
             <a:avLst/>
@@ -18227,7 +16031,7 @@
           <a:ln/>
         </p:spPr>
         <p:txBody>
-          <a:bodyPr wrap="square" lIns="0" tIns="25400" rIns="25400" bIns="0" rtlCol="0" anchor="ctr"/>
+          <a:bodyPr wrap="square" lIns="0" tIns="25400" rIns="25400" bIns="0" rtlCol="0" anchor="t"/>
           <a:lstStyle/>
           <a:p>
             <a:pPr algn="l" indent="0" marL="0">
@@ -18245,7 +16049,7 @@
                 <a:ea typeface="Pretendard" pitchFamily="34" charset="-122"/>
                 <a:cs typeface="Pretendard" pitchFamily="34" charset="-120"/>
               </a:rPr>
-              <a:t>Fewer bugs</a:t>
+              <a:t>- Fewer bugs</a:t>
             </a:r>
             <a:pPr algn="l" indent="0" marL="0">
               <a:lnSpc>
@@ -18270,71 +16074,14 @@
       </p:sp>
       <p:sp>
         <p:nvSpPr>
-          <p:cNvPr id="22" name="Shape 16"/>
-          <p:cNvSpPr/>
-          <p:nvPr/>
-        </p:nvSpPr>
-        <p:spPr>
-          <a:xfrm>
-            <a:off x="1097280" y="3466308"/>
-            <a:ext cx="474025" cy="474025"/>
-          </a:xfrm>
-          <a:prstGeom prst="roundRect">
-            <a:avLst>
-              <a:gd name="adj" fmla="val 7716"/>
-            </a:avLst>
-          </a:prstGeom>
-          <a:solidFill>
-            <a:srgbClr val="F8F4EF"/>
-          </a:solidFill>
-          <a:ln w="12700">
-            <a:solidFill>
-              <a:srgbClr val="C6CCC9"/>
-            </a:solidFill>
-            <a:prstDash val="solid"/>
-          </a:ln>
-        </p:spPr>
-      </p:sp>
-      <p:pic>
-        <p:nvPicPr>
-          <p:cNvPr id="23" name="Image 4" descr="article icon from tabler-icons (MIT)">    </p:cNvPr>
-          <p:cNvPicPr>
-            <a:picLocks noChangeAspect="1"/>
-          </p:cNvPicPr>
-          <p:nvPr/>
-        </p:nvPicPr>
-        <p:blipFill>
-          <a:blip r:embed="rId9">
-            <a:extLst>
-              <a:ext uri="{96DAC541-7B7A-43D3-8B79-37D633B846F1}">
-                <asvg:svgBlip xmlns:asvg="http://schemas.microsoft.com/office/drawing/2016/SVG/main" r:embed="rId10"/>
-              </a:ext>
-            </a:extLst>
-          </a:blip>
-          <a:stretch>
-            <a:fillRect/>
-          </a:stretch>
-        </p:blipFill>
-        <p:spPr>
-          <a:xfrm>
-            <a:off x="1170432" y="3539460"/>
-            <a:ext cx="327721" cy="327721"/>
-          </a:xfrm>
-          <a:prstGeom prst="rect">
-            <a:avLst/>
-          </a:prstGeom>
-        </p:spPr>
-      </p:pic>
-      <p:sp>
-        <p:nvSpPr>
-          <p:cNvPr id="24" name="Text 17"/>
+          <p:cNvPr id="12" name="Text 10"/>
           <p:cNvSpPr txBox="1"/>
           <p:nvPr/>
         </p:nvSpPr>
         <p:spPr>
           <a:xfrm>
-            <a:off x="1699321" y="3283428"/>
-            <a:ext cx="9255191" cy="839785"/>
+            <a:off x="6473952" y="1664208"/>
+            <a:ext cx="4791456" cy="4169664"/>
           </a:xfrm>
           <a:prstGeom prst="rect">
             <a:avLst/>
@@ -18343,7 +16090,7 @@
           <a:ln/>
         </p:spPr>
         <p:txBody>
-          <a:bodyPr wrap="square" lIns="0" tIns="25400" rIns="25400" bIns="0" rtlCol="0" anchor="ctr"/>
+          <a:bodyPr wrap="square" lIns="0" tIns="25400" rIns="25400" bIns="0" rtlCol="0" anchor="t"/>
           <a:lstStyle/>
           <a:p>
             <a:pPr algn="l" indent="0" marL="0">
@@ -18361,7 +16108,7 @@
                 <a:ea typeface="Pretendard" pitchFamily="34" charset="-122"/>
                 <a:cs typeface="Pretendard" pitchFamily="34" charset="-120"/>
               </a:rPr>
-              <a:t>Intuitive</a:t>
+              <a:t>- Intuitive</a:t>
             </a:r>
             <a:pPr algn="l" indent="0" marL="0">
               <a:lnSpc>
@@ -18379,122 +16126,6 @@
                 <a:cs typeface="Pretendard" pitchFamily="34" charset="-120"/>
               </a:rPr>
               <a:t>  Great editor support. Completion everywhere. Less time debugging.</a:t>
-            </a:r>
-            <a:endParaRPr lang="en-US" sz="2200" dirty="0"/>
-          </a:p>
-        </p:txBody>
-      </p:sp>
-      <p:sp>
-        <p:nvSpPr>
-          <p:cNvPr id="25" name="Shape 18"/>
-          <p:cNvSpPr/>
-          <p:nvPr/>
-        </p:nvSpPr>
-        <p:spPr>
-          <a:xfrm>
-            <a:off x="1097280" y="4783044"/>
-            <a:ext cx="474025" cy="474025"/>
-          </a:xfrm>
-          <a:prstGeom prst="roundRect">
-            <a:avLst>
-              <a:gd name="adj" fmla="val 7716"/>
-            </a:avLst>
-          </a:prstGeom>
-          <a:solidFill>
-            <a:srgbClr val="F8F4EF"/>
-          </a:solidFill>
-          <a:ln w="12700">
-            <a:solidFill>
-              <a:srgbClr val="C6CCC9"/>
-            </a:solidFill>
-            <a:prstDash val="solid"/>
-          </a:ln>
-        </p:spPr>
-      </p:sp>
-      <p:pic>
-        <p:nvPicPr>
-          <p:cNvPr id="26" name="Image 5" descr="palette icon from tabler-icons (MIT)">    </p:cNvPr>
-          <p:cNvPicPr>
-            <a:picLocks noChangeAspect="1"/>
-          </p:cNvPicPr>
-          <p:nvPr/>
-        </p:nvPicPr>
-        <p:blipFill>
-          <a:blip r:embed="rId11">
-            <a:extLst>
-              <a:ext uri="{96DAC541-7B7A-43D3-8B79-37D633B846F1}">
-                <asvg:svgBlip xmlns:asvg="http://schemas.microsoft.com/office/drawing/2016/SVG/main" r:embed="rId12"/>
-              </a:ext>
-            </a:extLst>
-          </a:blip>
-          <a:stretch>
-            <a:fillRect/>
-          </a:stretch>
-        </p:blipFill>
-        <p:spPr>
-          <a:xfrm>
-            <a:off x="1170432" y="4856196"/>
-            <a:ext cx="327721" cy="327721"/>
-          </a:xfrm>
-          <a:prstGeom prst="rect">
-            <a:avLst/>
-          </a:prstGeom>
-        </p:spPr>
-      </p:pic>
-      <p:sp>
-        <p:nvSpPr>
-          <p:cNvPr id="27" name="Text 19"/>
-          <p:cNvSpPr txBox="1"/>
-          <p:nvPr/>
-        </p:nvSpPr>
-        <p:spPr>
-          <a:xfrm>
-            <a:off x="1699321" y="4600164"/>
-            <a:ext cx="9255191" cy="839785"/>
-          </a:xfrm>
-          <a:prstGeom prst="rect">
-            <a:avLst/>
-          </a:prstGeom>
-          <a:noFill/>
-          <a:ln/>
-        </p:spPr>
-        <p:txBody>
-          <a:bodyPr wrap="square" lIns="0" tIns="25400" rIns="25400" bIns="0" rtlCol="0" anchor="ctr"/>
-          <a:lstStyle/>
-          <a:p>
-            <a:pPr algn="l" indent="0" marL="0">
-              <a:lnSpc>
-                <a:spcPct val="120000"/>
-              </a:lnSpc>
-              <a:buNone/>
-            </a:pPr>
-            <a:r>
-              <a:rPr lang="en-US" sz="2200" b="1" dirty="0">
-                <a:solidFill>
-                  <a:srgbClr val="0F766E"/>
-                </a:solidFill>
-                <a:latin typeface="Pretendard" pitchFamily="34" charset="0"/>
-                <a:ea typeface="Pretendard" pitchFamily="34" charset="-122"/>
-                <a:cs typeface="Pretendard" pitchFamily="34" charset="-120"/>
-              </a:rPr>
-              <a:t>Easy</a:t>
-            </a:r>
-            <a:pPr algn="l" indent="0" marL="0">
-              <a:lnSpc>
-                <a:spcPct val="120000"/>
-              </a:lnSpc>
-              <a:buNone/>
-            </a:pPr>
-            <a:r>
-              <a:rPr lang="en-US" sz="2200" dirty="0">
-                <a:solidFill>
-                  <a:srgbClr val="18181B"/>
-                </a:solidFill>
-                <a:latin typeface="Pretendard" pitchFamily="34" charset="0"/>
-                <a:ea typeface="Pretendard" pitchFamily="34" charset="-122"/>
-                <a:cs typeface="Pretendard" pitchFamily="34" charset="-120"/>
-              </a:rPr>
-              <a:t>  Designed to be easy to use and learn. Less time reading docs.</a:t>
             </a:r>
             <a:endParaRPr lang="en-US" sz="2200" dirty="0"/>
           </a:p>
@@ -19750,37 +17381,8 @@
         </p:nvSpPr>
         <p:spPr>
           <a:xfrm>
-            <a:off x="786384" y="1956816"/>
-            <a:ext cx="32004" cy="3483864"/>
-          </a:xfrm>
-          <a:prstGeom prst="rect">
-            <a:avLst/>
-          </a:prstGeom>
-          <a:solidFill>
-            <a:srgbClr val="9E0F62">
-              <a:alpha val="80000"/>
-            </a:srgbClr>
-          </a:solidFill>
-          <a:ln w="12700">
-            <a:solidFill>
-              <a:srgbClr val="9E0F62">
-                <a:alpha val="0"/>
-              </a:srgbClr>
-            </a:solidFill>
-            <a:prstDash val="solid"/>
-          </a:ln>
-        </p:spPr>
-      </p:sp>
-      <p:sp>
-        <p:nvSpPr>
-          <p:cNvPr id="9" name="Shape 7"/>
-          <p:cNvSpPr/>
-          <p:nvPr/>
-        </p:nvSpPr>
-        <p:spPr>
-          <a:xfrm>
-            <a:off x="914400" y="1865376"/>
-            <a:ext cx="73152" cy="1024128"/>
+            <a:off x="822960" y="1554480"/>
+            <a:ext cx="4937760" cy="73152"/>
           </a:xfrm>
           <a:prstGeom prst="rect">
             <a:avLst/>
@@ -19800,41 +17402,14 @@
       </p:sp>
       <p:sp>
         <p:nvSpPr>
-          <p:cNvPr id="10" name="Shape 8"/>
-          <p:cNvSpPr/>
-          <p:nvPr/>
-        </p:nvSpPr>
-        <p:spPr>
-          <a:xfrm>
-            <a:off x="914400" y="3191256"/>
-            <a:ext cx="73152" cy="1024128"/>
-          </a:xfrm>
-          <a:prstGeom prst="rect">
-            <a:avLst/>
-          </a:prstGeom>
-          <a:solidFill>
-            <a:srgbClr val="9E0F62"/>
-          </a:solidFill>
-          <a:ln w="12700">
-            <a:solidFill>
-              <a:srgbClr val="9E0F62">
-                <a:alpha val="0"/>
-              </a:srgbClr>
-            </a:solidFill>
-            <a:prstDash val="solid"/>
-          </a:ln>
-        </p:spPr>
-      </p:sp>
-      <p:sp>
-        <p:nvSpPr>
-          <p:cNvPr id="11" name="Shape 9"/>
-          <p:cNvSpPr/>
-          <p:nvPr/>
-        </p:nvSpPr>
-        <p:spPr>
-          <a:xfrm>
-            <a:off x="914400" y="4507992"/>
-            <a:ext cx="73152" cy="1024128"/>
+          <p:cNvPr id="9" name="Shape 7"/>
+          <p:cNvSpPr/>
+          <p:nvPr/>
+        </p:nvSpPr>
+        <p:spPr>
+          <a:xfrm>
+            <a:off x="6400800" y="1554480"/>
+            <a:ext cx="4937760" cy="73152"/>
           </a:xfrm>
           <a:prstGeom prst="rect">
             <a:avLst/>
@@ -19852,207 +17427,9 @@
           </a:ln>
         </p:spPr>
       </p:sp>
-      <p:pic>
-        <p:nvPicPr>
-          <p:cNvPr id="12" name="Image 0" descr="preencoded.png">    </p:cNvPr>
-          <p:cNvPicPr>
-            <a:picLocks noChangeAspect="1"/>
-          </p:cNvPicPr>
-          <p:nvPr/>
-        </p:nvPicPr>
-        <p:blipFill>
-          <a:blip r:embed="rId1">
-            <a:extLst>
-              <a:ext uri="{96DAC541-7B7A-43D3-8B79-37D633B846F1}">
-                <asvg:svgBlip xmlns:asvg="http://schemas.microsoft.com/office/drawing/2016/SVG/main" r:embed="rId2"/>
-              </a:ext>
-            </a:extLst>
-          </a:blip>
-          <a:stretch>
-            <a:fillRect/>
-          </a:stretch>
-        </p:blipFill>
-        <p:spPr>
-          <a:xfrm>
-            <a:off x="914400" y="1865376"/>
-            <a:ext cx="10241280" cy="1024128"/>
-          </a:xfrm>
-          <a:prstGeom prst="rect">
-            <a:avLst/>
-          </a:prstGeom>
-        </p:spPr>
-      </p:pic>
-      <p:sp>
-        <p:nvSpPr>
-          <p:cNvPr id="13" name="Shape 10"/>
-          <p:cNvSpPr/>
-          <p:nvPr/>
-        </p:nvSpPr>
-        <p:spPr>
-          <a:xfrm>
-            <a:off x="914400" y="1865376"/>
-            <a:ext cx="10241280" cy="1024128"/>
-          </a:xfrm>
-          <a:prstGeom prst="rect">
-            <a:avLst/>
-          </a:prstGeom>
-          <a:solidFill>
-            <a:srgbClr val="FBF8F3">
-              <a:alpha val="0"/>
-            </a:srgbClr>
-          </a:solidFill>
-          <a:ln w="12700">
-            <a:solidFill>
-              <a:srgbClr val="C6CCC9">
-                <a:alpha val="0"/>
-              </a:srgbClr>
-            </a:solidFill>
-            <a:prstDash val="solid"/>
-          </a:ln>
-          <a:effectLst>
-            <a:outerShdw sx="100000" sy="100000" kx="0" ky="0" algn="bl" rotWithShape="0" blurRad="12700" dist="50800" dir="2700000">
-              <a:srgbClr val="000000">
-                <a:alpha val="8000"/>
-              </a:srgbClr>
-            </a:outerShdw>
-          </a:effectLst>
-        </p:spPr>
-      </p:sp>
-      <p:pic>
-        <p:nvPicPr>
-          <p:cNvPr id="14" name="Image 1" descr="preencoded.png">    </p:cNvPr>
-          <p:cNvPicPr>
-            <a:picLocks noChangeAspect="1"/>
-          </p:cNvPicPr>
-          <p:nvPr/>
-        </p:nvPicPr>
-        <p:blipFill>
-          <a:blip r:embed="rId3">
-            <a:extLst>
-              <a:ext uri="{96DAC541-7B7A-43D3-8B79-37D633B846F1}">
-                <asvg:svgBlip xmlns:asvg="http://schemas.microsoft.com/office/drawing/2016/SVG/main" r:embed="rId4"/>
-              </a:ext>
-            </a:extLst>
-          </a:blip>
-          <a:stretch>
-            <a:fillRect/>
-          </a:stretch>
-        </p:blipFill>
-        <p:spPr>
-          <a:xfrm>
-            <a:off x="914400" y="3191256"/>
-            <a:ext cx="10241280" cy="1024128"/>
-          </a:xfrm>
-          <a:prstGeom prst="rect">
-            <a:avLst/>
-          </a:prstGeom>
-        </p:spPr>
-      </p:pic>
-      <p:sp>
-        <p:nvSpPr>
-          <p:cNvPr id="15" name="Shape 11"/>
-          <p:cNvSpPr/>
-          <p:nvPr/>
-        </p:nvSpPr>
-        <p:spPr>
-          <a:xfrm>
-            <a:off x="914400" y="3191256"/>
-            <a:ext cx="10241280" cy="1024128"/>
-          </a:xfrm>
-          <a:prstGeom prst="rect">
-            <a:avLst/>
-          </a:prstGeom>
-          <a:solidFill>
-            <a:srgbClr val="FBF8F3">
-              <a:alpha val="0"/>
-            </a:srgbClr>
-          </a:solidFill>
-          <a:ln w="12700">
-            <a:solidFill>
-              <a:srgbClr val="C6CCC9">
-                <a:alpha val="0"/>
-              </a:srgbClr>
-            </a:solidFill>
-            <a:prstDash val="solid"/>
-          </a:ln>
-          <a:effectLst>
-            <a:outerShdw sx="100000" sy="100000" kx="0" ky="0" algn="bl" rotWithShape="0" blurRad="12700" dist="50800" dir="2700000">
-              <a:srgbClr val="000000">
-                <a:alpha val="8000"/>
-              </a:srgbClr>
-            </a:outerShdw>
-          </a:effectLst>
-        </p:spPr>
-      </p:sp>
-      <p:pic>
-        <p:nvPicPr>
-          <p:cNvPr id="16" name="Image 2" descr="preencoded.png">    </p:cNvPr>
-          <p:cNvPicPr>
-            <a:picLocks noChangeAspect="1"/>
-          </p:cNvPicPr>
-          <p:nvPr/>
-        </p:nvPicPr>
-        <p:blipFill>
-          <a:blip r:embed="rId5">
-            <a:extLst>
-              <a:ext uri="{96DAC541-7B7A-43D3-8B79-37D633B846F1}">
-                <asvg:svgBlip xmlns:asvg="http://schemas.microsoft.com/office/drawing/2016/SVG/main" r:embed="rId6"/>
-              </a:ext>
-            </a:extLst>
-          </a:blip>
-          <a:stretch>
-            <a:fillRect/>
-          </a:stretch>
-        </p:blipFill>
-        <p:spPr>
-          <a:xfrm>
-            <a:off x="914400" y="4507992"/>
-            <a:ext cx="10241280" cy="1024128"/>
-          </a:xfrm>
-          <a:prstGeom prst="rect">
-            <a:avLst/>
-          </a:prstGeom>
-        </p:spPr>
-      </p:pic>
-      <p:sp>
-        <p:nvSpPr>
-          <p:cNvPr id="17" name="Shape 12"/>
-          <p:cNvSpPr/>
-          <p:nvPr/>
-        </p:nvSpPr>
-        <p:spPr>
-          <a:xfrm>
-            <a:off x="914400" y="4507992"/>
-            <a:ext cx="10241280" cy="1024128"/>
-          </a:xfrm>
-          <a:prstGeom prst="rect">
-            <a:avLst/>
-          </a:prstGeom>
-          <a:solidFill>
-            <a:srgbClr val="FBF8F3">
-              <a:alpha val="0"/>
-            </a:srgbClr>
-          </a:solidFill>
-          <a:ln w="12700">
-            <a:solidFill>
-              <a:srgbClr val="C6CCC9">
-                <a:alpha val="0"/>
-              </a:srgbClr>
-            </a:solidFill>
-            <a:prstDash val="solid"/>
-          </a:ln>
-          <a:effectLst>
-            <a:outerShdw sx="100000" sy="100000" kx="0" ky="0" algn="bl" rotWithShape="0" blurRad="12700" dist="50800" dir="2700000">
-              <a:srgbClr val="000000">
-                <a:alpha val="8000"/>
-              </a:srgbClr>
-            </a:outerShdw>
-          </a:effectLst>
-        </p:spPr>
-      </p:sp>
-      <p:sp>
-        <p:nvSpPr>
-          <p:cNvPr id="18" name="Text 13"/>
+      <p:sp>
+        <p:nvSpPr>
+          <p:cNvPr id="10" name="Text 8"/>
           <p:cNvSpPr txBox="1"/>
           <p:nvPr/>
         </p:nvSpPr>
@@ -20094,170 +17471,14 @@
       </p:sp>
       <p:sp>
         <p:nvSpPr>
-          <p:cNvPr id="19" name="Shape 14"/>
-          <p:cNvSpPr/>
-          <p:nvPr/>
-        </p:nvSpPr>
-        <p:spPr>
-          <a:xfrm>
-            <a:off x="1097280" y="2140428"/>
-            <a:ext cx="474025" cy="474025"/>
-          </a:xfrm>
-          <a:prstGeom prst="roundRect">
-            <a:avLst>
-              <a:gd name="adj" fmla="val 7716"/>
-            </a:avLst>
-          </a:prstGeom>
-          <a:solidFill>
-            <a:srgbClr val="F8F4EF"/>
-          </a:solidFill>
-          <a:ln w="12700">
-            <a:solidFill>
-              <a:srgbClr val="C6CCC9"/>
-            </a:solidFill>
-            <a:prstDash val="solid"/>
-          </a:ln>
-        </p:spPr>
-      </p:sp>
-      <p:pic>
-        <p:nvPicPr>
-          <p:cNvPr id="20" name="Image 3" descr="article icon from tabler-icons (MIT)">    </p:cNvPr>
-          <p:cNvPicPr>
-            <a:picLocks noChangeAspect="1"/>
-          </p:cNvPicPr>
-          <p:nvPr/>
-        </p:nvPicPr>
-        <p:blipFill>
-          <a:blip r:embed="rId7">
-            <a:extLst>
-              <a:ext uri="{96DAC541-7B7A-43D3-8B79-37D633B846F1}">
-                <asvg:svgBlip xmlns:asvg="http://schemas.microsoft.com/office/drawing/2016/SVG/main" r:embed="rId8"/>
-              </a:ext>
-            </a:extLst>
-          </a:blip>
-          <a:stretch>
-            <a:fillRect/>
-          </a:stretch>
-        </p:blipFill>
-        <p:spPr>
-          <a:xfrm>
-            <a:off x="1170432" y="2213580"/>
-            <a:ext cx="327721" cy="327721"/>
-          </a:xfrm>
-          <a:prstGeom prst="rect">
-            <a:avLst/>
-          </a:prstGeom>
-        </p:spPr>
-      </p:pic>
-      <p:sp>
-        <p:nvSpPr>
-          <p:cNvPr id="21" name="Text 15"/>
+          <p:cNvPr id="11" name="Text 9"/>
           <p:cNvSpPr txBox="1"/>
           <p:nvPr/>
         </p:nvSpPr>
         <p:spPr>
           <a:xfrm>
-            <a:off x="1699321" y="2164080"/>
-            <a:ext cx="9255191" cy="426720"/>
-          </a:xfrm>
-          <a:prstGeom prst="rect">
-            <a:avLst/>
-          </a:prstGeom>
-          <a:noFill/>
-          <a:ln/>
-        </p:spPr>
-        <p:txBody>
-          <a:bodyPr wrap="square" lIns="0" tIns="25400" rIns="25400" bIns="0" rtlCol="0" anchor="ctr"/>
-          <a:lstStyle/>
-          <a:p>
-            <a:pPr algn="ctr" indent="0" marL="0">
-              <a:lnSpc>
-                <a:spcPct val="120000"/>
-              </a:lnSpc>
-              <a:buNone/>
-            </a:pPr>
-            <a:r>
-              <a:rPr lang="en-US" sz="2200" dirty="0">
-                <a:solidFill>
-                  <a:srgbClr val="18181B"/>
-                </a:solidFill>
-                <a:latin typeface="Pretendard" pitchFamily="34" charset="0"/>
-                <a:ea typeface="Pretendard" pitchFamily="34" charset="-122"/>
-                <a:cs typeface="Pretendard" pitchFamily="34" charset="-120"/>
-              </a:rPr>
-              <a:t>Additional advanced functionality</a:t>
-            </a:r>
-            <a:endParaRPr lang="en-US" sz="2200" dirty="0"/>
-          </a:p>
-        </p:txBody>
-      </p:sp>
-      <p:sp>
-        <p:nvSpPr>
-          <p:cNvPr id="22" name="Shape 16"/>
-          <p:cNvSpPr/>
-          <p:nvPr/>
-        </p:nvSpPr>
-        <p:spPr>
-          <a:xfrm>
-            <a:off x="1097280" y="3466308"/>
-            <a:ext cx="474025" cy="474025"/>
-          </a:xfrm>
-          <a:prstGeom prst="roundRect">
-            <a:avLst>
-              <a:gd name="adj" fmla="val 7716"/>
-            </a:avLst>
-          </a:prstGeom>
-          <a:solidFill>
-            <a:srgbClr val="F8F4EF"/>
-          </a:solidFill>
-          <a:ln w="12700">
-            <a:solidFill>
-              <a:srgbClr val="C6CCC9"/>
-            </a:solidFill>
-            <a:prstDash val="solid"/>
-          </a:ln>
-        </p:spPr>
-      </p:sp>
-      <p:pic>
-        <p:nvPicPr>
-          <p:cNvPr id="23" name="Image 4" descr="article icon from tabler-icons (MIT)">    </p:cNvPr>
-          <p:cNvPicPr>
-            <a:picLocks noChangeAspect="1"/>
-          </p:cNvPicPr>
-          <p:nvPr/>
-        </p:nvPicPr>
-        <p:blipFill>
-          <a:blip r:embed="rId9">
-            <a:extLst>
-              <a:ext uri="{96DAC541-7B7A-43D3-8B79-37D633B846F1}">
-                <asvg:svgBlip xmlns:asvg="http://schemas.microsoft.com/office/drawing/2016/SVG/main" r:embed="rId10"/>
-              </a:ext>
-            </a:extLst>
-          </a:blip>
-          <a:stretch>
-            <a:fillRect/>
-          </a:stretch>
-        </p:blipFill>
-        <p:spPr>
-          <a:xfrm>
-            <a:off x="1170432" y="3539460"/>
-            <a:ext cx="327721" cy="327721"/>
-          </a:xfrm>
-          <a:prstGeom prst="rect">
-            <a:avLst/>
-          </a:prstGeom>
-        </p:spPr>
-      </p:pic>
-      <p:sp>
-        <p:nvSpPr>
-          <p:cNvPr id="24" name="Text 17"/>
-          <p:cNvSpPr txBox="1"/>
-          <p:nvPr/>
-        </p:nvSpPr>
-        <p:spPr>
-          <a:xfrm>
-            <a:off x="1699321" y="3283428"/>
-            <a:ext cx="9255191" cy="839785"/>
+            <a:off x="896112" y="3368040"/>
+            <a:ext cx="4791456" cy="762000"/>
           </a:xfrm>
           <a:prstGeom prst="rect">
             <a:avLst/>
@@ -20284,7 +17505,49 @@
                 <a:ea typeface="Pretendard" pitchFamily="34" charset="-122"/>
                 <a:cs typeface="Pretendard" pitchFamily="34" charset="-120"/>
               </a:rPr>
-              <a:t>azure</a:t>
+              <a:t>- Additional advanced functionality</a:t>
+            </a:r>
+            <a:endParaRPr lang="en-US" sz="2200" dirty="0"/>
+          </a:p>
+        </p:txBody>
+      </p:sp>
+      <p:sp>
+        <p:nvSpPr>
+          <p:cNvPr id="12" name="Text 10"/>
+          <p:cNvSpPr txBox="1"/>
+          <p:nvPr/>
+        </p:nvSpPr>
+        <p:spPr>
+          <a:xfrm>
+            <a:off x="6473952" y="1664208"/>
+            <a:ext cx="4791456" cy="4169664"/>
+          </a:xfrm>
+          <a:prstGeom prst="rect">
+            <a:avLst/>
+          </a:prstGeom>
+          <a:noFill/>
+          <a:ln/>
+        </p:spPr>
+        <p:txBody>
+          <a:bodyPr wrap="square" lIns="0" tIns="25400" rIns="25400" bIns="0" rtlCol="0" anchor="t"/>
+          <a:lstStyle/>
+          <a:p>
+            <a:pPr algn="l" indent="0" marL="0">
+              <a:lnSpc>
+                <a:spcPct val="120000"/>
+              </a:lnSpc>
+              <a:buNone/>
+            </a:pPr>
+            <a:r>
+              <a:rPr lang="en-US" sz="2200" dirty="0">
+                <a:solidFill>
+                  <a:srgbClr val="18181B"/>
+                </a:solidFill>
+                <a:latin typeface="Pretendard" pitchFamily="34" charset="0"/>
+                <a:ea typeface="Pretendard" pitchFamily="34" charset="-122"/>
+                <a:cs typeface="Pretendard" pitchFamily="34" charset="-120"/>
+              </a:rPr>
+              <a:t>- azure</a:t>
             </a:r>
             <a:pPr algn="l" indent="0" marL="0">
               <a:lnSpc>
@@ -20319,139 +17582,6 @@
                 <a:cs typeface="Pretendard" pitchFamily="34" charset="-120"/>
               </a:rPr>
               <a:t>OPENAI_ENDPOINT environment variable)</a:t>
-            </a:r>
-            <a:endParaRPr lang="en-US" sz="2200" dirty="0"/>
-          </a:p>
-        </p:txBody>
-      </p:sp>
-      <p:sp>
-        <p:nvSpPr>
-          <p:cNvPr id="25" name="Shape 18"/>
-          <p:cNvSpPr/>
-          <p:nvPr/>
-        </p:nvSpPr>
-        <p:spPr>
-          <a:xfrm>
-            <a:off x="1097280" y="4783044"/>
-            <a:ext cx="474025" cy="474025"/>
-          </a:xfrm>
-          <a:prstGeom prst="roundRect">
-            <a:avLst>
-              <a:gd name="adj" fmla="val 7716"/>
-            </a:avLst>
-          </a:prstGeom>
-          <a:solidFill>
-            <a:srgbClr val="F8F4EF"/>
-          </a:solidFill>
-          <a:ln w="12700">
-            <a:solidFill>
-              <a:srgbClr val="C6CCC9"/>
-            </a:solidFill>
-            <a:prstDash val="solid"/>
-          </a:ln>
-        </p:spPr>
-      </p:sp>
-      <p:pic>
-        <p:nvPicPr>
-          <p:cNvPr id="26" name="Image 5" descr="cloud icon from svgrepo (open-license catalog pattern)">    </p:cNvPr>
-          <p:cNvPicPr>
-            <a:picLocks noChangeAspect="1"/>
-          </p:cNvPicPr>
-          <p:nvPr/>
-        </p:nvPicPr>
-        <p:blipFill>
-          <a:blip r:embed="rId11">
-            <a:extLst>
-              <a:ext uri="{96DAC541-7B7A-43D3-8B79-37D633B846F1}">
-                <asvg:svgBlip xmlns:asvg="http://schemas.microsoft.com/office/drawing/2016/SVG/main" r:embed="rId12"/>
-              </a:ext>
-            </a:extLst>
-          </a:blip>
-          <a:stretch>
-            <a:fillRect/>
-          </a:stretch>
-        </p:blipFill>
-        <p:spPr>
-          <a:xfrm>
-            <a:off x="1170432" y="4856196"/>
-            <a:ext cx="327721" cy="327721"/>
-          </a:xfrm>
-          <a:prstGeom prst="rect">
-            <a:avLst/>
-          </a:prstGeom>
-        </p:spPr>
-      </p:pic>
-      <p:sp>
-        <p:nvSpPr>
-          <p:cNvPr id="27" name="Text 19"/>
-          <p:cNvSpPr txBox="1"/>
-          <p:nvPr/>
-        </p:nvSpPr>
-        <p:spPr>
-          <a:xfrm>
-            <a:off x="1699321" y="4600164"/>
-            <a:ext cx="9255191" cy="839785"/>
-          </a:xfrm>
-          <a:prstGeom prst="rect">
-            <a:avLst/>
-          </a:prstGeom>
-          <a:noFill/>
-          <a:ln/>
-        </p:spPr>
-        <p:txBody>
-          <a:bodyPr wrap="square" lIns="0" tIns="25400" rIns="25400" bIns="0" rtlCol="0" anchor="ctr"/>
-          <a:lstStyle/>
-          <a:p>
-            <a:pPr algn="l" indent="0" marL="0">
-              <a:lnSpc>
-                <a:spcPct val="120000"/>
-              </a:lnSpc>
-              <a:buNone/>
-            </a:pPr>
-            <a:r>
-              <a:rPr lang="en-US" sz="2200" dirty="0">
-                <a:solidFill>
-                  <a:srgbClr val="18181B"/>
-                </a:solidFill>
-                <a:latin typeface="Pretendard" pitchFamily="34" charset="0"/>
-                <a:ea typeface="Pretendard" pitchFamily="34" charset="-122"/>
-                <a:cs typeface="Pretendard" pitchFamily="34" charset="-120"/>
-              </a:rPr>
-              <a:t>api</a:t>
-            </a:r>
-            <a:pPr algn="l" indent="0" marL="0">
-              <a:lnSpc>
-                <a:spcPct val="120000"/>
-              </a:lnSpc>
-              <a:buNone/>
-            </a:pPr>
-            <a:r>
-              <a:rPr lang="en-US" sz="2200" i="1" dirty="0">
-                <a:solidFill>
-                  <a:srgbClr val="18181B"/>
-                </a:solidFill>
-                <a:latin typeface="Pretendard" pitchFamily="34" charset="0"/>
-                <a:ea typeface="Pretendard" pitchFamily="34" charset="-122"/>
-                <a:cs typeface="Pretendard" pitchFamily="34" charset="-120"/>
-              </a:rPr>
-              <a:t>version (or the OPENAI</a:t>
-            </a:r>
-            <a:pPr algn="l" indent="0" marL="0">
-              <a:lnSpc>
-                <a:spcPct val="120000"/>
-              </a:lnSpc>
-              <a:buNone/>
-            </a:pPr>
-            <a:r>
-              <a:rPr lang="en-US" sz="2200" dirty="0">
-                <a:solidFill>
-                  <a:srgbClr val="18181B"/>
-                </a:solidFill>
-                <a:latin typeface="Pretendard" pitchFamily="34" charset="0"/>
-                <a:ea typeface="Pretendard" pitchFamily="34" charset="-122"/>
-                <a:cs typeface="Pretendard" pitchFamily="34" charset="-120"/>
-              </a:rPr>
-              <a:t>API_VERSION environment variable)</a:t>
             </a:r>
             <a:endParaRPr lang="en-US" sz="2200" dirty="0"/>
           </a:p>
@@ -21741,37 +18871,8 @@
         </p:nvSpPr>
         <p:spPr>
           <a:xfrm>
-            <a:off x="786384" y="1956816"/>
-            <a:ext cx="32004" cy="3483864"/>
-          </a:xfrm>
-          <a:prstGeom prst="rect">
-            <a:avLst/>
-          </a:prstGeom>
-          <a:solidFill>
-            <a:srgbClr val="9E0F62">
-              <a:alpha val="80000"/>
-            </a:srgbClr>
-          </a:solidFill>
-          <a:ln w="12700">
-            <a:solidFill>
-              <a:srgbClr val="9E0F62">
-                <a:alpha val="0"/>
-              </a:srgbClr>
-            </a:solidFill>
-            <a:prstDash val="solid"/>
-          </a:ln>
-        </p:spPr>
-      </p:sp>
-      <p:sp>
-        <p:nvSpPr>
-          <p:cNvPr id="9" name="Shape 7"/>
-          <p:cNvSpPr/>
-          <p:nvPr/>
-        </p:nvSpPr>
-        <p:spPr>
-          <a:xfrm>
-            <a:off x="914400" y="1865376"/>
-            <a:ext cx="73152" cy="1024128"/>
+            <a:off x="822960" y="1554480"/>
+            <a:ext cx="4937760" cy="73152"/>
           </a:xfrm>
           <a:prstGeom prst="rect">
             <a:avLst/>
@@ -21791,41 +18892,14 @@
       </p:sp>
       <p:sp>
         <p:nvSpPr>
-          <p:cNvPr id="10" name="Shape 8"/>
-          <p:cNvSpPr/>
-          <p:nvPr/>
-        </p:nvSpPr>
-        <p:spPr>
-          <a:xfrm>
-            <a:off x="914400" y="3191256"/>
-            <a:ext cx="73152" cy="1024128"/>
-          </a:xfrm>
-          <a:prstGeom prst="rect">
-            <a:avLst/>
-          </a:prstGeom>
-          <a:solidFill>
-            <a:srgbClr val="9E0F62"/>
-          </a:solidFill>
-          <a:ln w="12700">
-            <a:solidFill>
-              <a:srgbClr val="9E0F62">
-                <a:alpha val="0"/>
-              </a:srgbClr>
-            </a:solidFill>
-            <a:prstDash val="solid"/>
-          </a:ln>
-        </p:spPr>
-      </p:sp>
-      <p:sp>
-        <p:nvSpPr>
-          <p:cNvPr id="11" name="Shape 9"/>
-          <p:cNvSpPr/>
-          <p:nvPr/>
-        </p:nvSpPr>
-        <p:spPr>
-          <a:xfrm>
-            <a:off x="914400" y="4507992"/>
-            <a:ext cx="73152" cy="1024128"/>
+          <p:cNvPr id="9" name="Shape 7"/>
+          <p:cNvSpPr/>
+          <p:nvPr/>
+        </p:nvSpPr>
+        <p:spPr>
+          <a:xfrm>
+            <a:off x="6400800" y="1554480"/>
+            <a:ext cx="4937760" cy="73152"/>
           </a:xfrm>
           <a:prstGeom prst="rect">
             <a:avLst/>
@@ -21843,207 +18917,9 @@
           </a:ln>
         </p:spPr>
       </p:sp>
-      <p:pic>
-        <p:nvPicPr>
-          <p:cNvPr id="12" name="Image 0" descr="preencoded.png">    </p:cNvPr>
-          <p:cNvPicPr>
-            <a:picLocks noChangeAspect="1"/>
-          </p:cNvPicPr>
-          <p:nvPr/>
-        </p:nvPicPr>
-        <p:blipFill>
-          <a:blip r:embed="rId1">
-            <a:extLst>
-              <a:ext uri="{96DAC541-7B7A-43D3-8B79-37D633B846F1}">
-                <asvg:svgBlip xmlns:asvg="http://schemas.microsoft.com/office/drawing/2016/SVG/main" r:embed="rId2"/>
-              </a:ext>
-            </a:extLst>
-          </a:blip>
-          <a:stretch>
-            <a:fillRect/>
-          </a:stretch>
-        </p:blipFill>
-        <p:spPr>
-          <a:xfrm>
-            <a:off x="914400" y="1865376"/>
-            <a:ext cx="10241280" cy="1024128"/>
-          </a:xfrm>
-          <a:prstGeom prst="rect">
-            <a:avLst/>
-          </a:prstGeom>
-        </p:spPr>
-      </p:pic>
-      <p:sp>
-        <p:nvSpPr>
-          <p:cNvPr id="13" name="Shape 10"/>
-          <p:cNvSpPr/>
-          <p:nvPr/>
-        </p:nvSpPr>
-        <p:spPr>
-          <a:xfrm>
-            <a:off x="914400" y="1865376"/>
-            <a:ext cx="10241280" cy="1024128"/>
-          </a:xfrm>
-          <a:prstGeom prst="rect">
-            <a:avLst/>
-          </a:prstGeom>
-          <a:solidFill>
-            <a:srgbClr val="FBF8F3">
-              <a:alpha val="0"/>
-            </a:srgbClr>
-          </a:solidFill>
-          <a:ln w="12700">
-            <a:solidFill>
-              <a:srgbClr val="C6CCC9">
-                <a:alpha val="0"/>
-              </a:srgbClr>
-            </a:solidFill>
-            <a:prstDash val="solid"/>
-          </a:ln>
-          <a:effectLst>
-            <a:outerShdw sx="100000" sy="100000" kx="0" ky="0" algn="bl" rotWithShape="0" blurRad="12700" dist="50800" dir="2700000">
-              <a:srgbClr val="000000">
-                <a:alpha val="8000"/>
-              </a:srgbClr>
-            </a:outerShdw>
-          </a:effectLst>
-        </p:spPr>
-      </p:sp>
-      <p:pic>
-        <p:nvPicPr>
-          <p:cNvPr id="14" name="Image 1" descr="preencoded.png">    </p:cNvPr>
-          <p:cNvPicPr>
-            <a:picLocks noChangeAspect="1"/>
-          </p:cNvPicPr>
-          <p:nvPr/>
-        </p:nvPicPr>
-        <p:blipFill>
-          <a:blip r:embed="rId3">
-            <a:extLst>
-              <a:ext uri="{96DAC541-7B7A-43D3-8B79-37D633B846F1}">
-                <asvg:svgBlip xmlns:asvg="http://schemas.microsoft.com/office/drawing/2016/SVG/main" r:embed="rId4"/>
-              </a:ext>
-            </a:extLst>
-          </a:blip>
-          <a:stretch>
-            <a:fillRect/>
-          </a:stretch>
-        </p:blipFill>
-        <p:spPr>
-          <a:xfrm>
-            <a:off x="914400" y="3191256"/>
-            <a:ext cx="10241280" cy="1024128"/>
-          </a:xfrm>
-          <a:prstGeom prst="rect">
-            <a:avLst/>
-          </a:prstGeom>
-        </p:spPr>
-      </p:pic>
-      <p:sp>
-        <p:nvSpPr>
-          <p:cNvPr id="15" name="Shape 11"/>
-          <p:cNvSpPr/>
-          <p:nvPr/>
-        </p:nvSpPr>
-        <p:spPr>
-          <a:xfrm>
-            <a:off x="914400" y="3191256"/>
-            <a:ext cx="10241280" cy="1024128"/>
-          </a:xfrm>
-          <a:prstGeom prst="rect">
-            <a:avLst/>
-          </a:prstGeom>
-          <a:solidFill>
-            <a:srgbClr val="FBF8F3">
-              <a:alpha val="0"/>
-            </a:srgbClr>
-          </a:solidFill>
-          <a:ln w="12700">
-            <a:solidFill>
-              <a:srgbClr val="C6CCC9">
-                <a:alpha val="0"/>
-              </a:srgbClr>
-            </a:solidFill>
-            <a:prstDash val="solid"/>
-          </a:ln>
-          <a:effectLst>
-            <a:outerShdw sx="100000" sy="100000" kx="0" ky="0" algn="bl" rotWithShape="0" blurRad="12700" dist="50800" dir="2700000">
-              <a:srgbClr val="000000">
-                <a:alpha val="8000"/>
-              </a:srgbClr>
-            </a:outerShdw>
-          </a:effectLst>
-        </p:spPr>
-      </p:sp>
-      <p:pic>
-        <p:nvPicPr>
-          <p:cNvPr id="16" name="Image 2" descr="preencoded.png">    </p:cNvPr>
-          <p:cNvPicPr>
-            <a:picLocks noChangeAspect="1"/>
-          </p:cNvPicPr>
-          <p:nvPr/>
-        </p:nvPicPr>
-        <p:blipFill>
-          <a:blip r:embed="rId5">
-            <a:extLst>
-              <a:ext uri="{96DAC541-7B7A-43D3-8B79-37D633B846F1}">
-                <asvg:svgBlip xmlns:asvg="http://schemas.microsoft.com/office/drawing/2016/SVG/main" r:embed="rId6"/>
-              </a:ext>
-            </a:extLst>
-          </a:blip>
-          <a:stretch>
-            <a:fillRect/>
-          </a:stretch>
-        </p:blipFill>
-        <p:spPr>
-          <a:xfrm>
-            <a:off x="914400" y="4507992"/>
-            <a:ext cx="10241280" cy="1024128"/>
-          </a:xfrm>
-          <a:prstGeom prst="rect">
-            <a:avLst/>
-          </a:prstGeom>
-        </p:spPr>
-      </p:pic>
-      <p:sp>
-        <p:nvSpPr>
-          <p:cNvPr id="17" name="Shape 12"/>
-          <p:cNvSpPr/>
-          <p:nvPr/>
-        </p:nvSpPr>
-        <p:spPr>
-          <a:xfrm>
-            <a:off x="914400" y="4507992"/>
-            <a:ext cx="10241280" cy="1024128"/>
-          </a:xfrm>
-          <a:prstGeom prst="rect">
-            <a:avLst/>
-          </a:prstGeom>
-          <a:solidFill>
-            <a:srgbClr val="FBF8F3">
-              <a:alpha val="0"/>
-            </a:srgbClr>
-          </a:solidFill>
-          <a:ln w="12700">
-            <a:solidFill>
-              <a:srgbClr val="C6CCC9">
-                <a:alpha val="0"/>
-              </a:srgbClr>
-            </a:solidFill>
-            <a:prstDash val="solid"/>
-          </a:ln>
-          <a:effectLst>
-            <a:outerShdw sx="100000" sy="100000" kx="0" ky="0" algn="bl" rotWithShape="0" blurRad="12700" dist="50800" dir="2700000">
-              <a:srgbClr val="000000">
-                <a:alpha val="8000"/>
-              </a:srgbClr>
-            </a:outerShdw>
-          </a:effectLst>
-        </p:spPr>
-      </p:sp>
-      <p:sp>
-        <p:nvSpPr>
-          <p:cNvPr id="18" name="Text 13"/>
+      <p:sp>
+        <p:nvSpPr>
+          <p:cNvPr id="10" name="Text 8"/>
           <p:cNvSpPr txBox="1"/>
           <p:nvPr/>
         </p:nvSpPr>
@@ -22085,71 +18961,14 @@
       </p:sp>
       <p:sp>
         <p:nvSpPr>
-          <p:cNvPr id="19" name="Shape 14"/>
-          <p:cNvSpPr/>
-          <p:nvPr/>
-        </p:nvSpPr>
-        <p:spPr>
-          <a:xfrm>
-            <a:off x="1097280" y="2140428"/>
-            <a:ext cx="474025" cy="474025"/>
-          </a:xfrm>
-          <a:prstGeom prst="roundRect">
-            <a:avLst>
-              <a:gd name="adj" fmla="val 7716"/>
-            </a:avLst>
-          </a:prstGeom>
-          <a:solidFill>
-            <a:srgbClr val="F8F4EF"/>
-          </a:solidFill>
-          <a:ln w="12700">
-            <a:solidFill>
-              <a:srgbClr val="C6CCC9"/>
-            </a:solidFill>
-            <a:prstDash val="solid"/>
-          </a:ln>
-        </p:spPr>
-      </p:sp>
-      <p:pic>
-        <p:nvPicPr>
-          <p:cNvPr id="20" name="Image 3" descr="article icon from tabler-icons (MIT)">    </p:cNvPr>
-          <p:cNvPicPr>
-            <a:picLocks noChangeAspect="1"/>
-          </p:cNvPicPr>
-          <p:nvPr/>
-        </p:nvPicPr>
-        <p:blipFill>
-          <a:blip r:embed="rId7">
-            <a:extLst>
-              <a:ext uri="{96DAC541-7B7A-43D3-8B79-37D633B846F1}">
-                <asvg:svgBlip xmlns:asvg="http://schemas.microsoft.com/office/drawing/2016/SVG/main" r:embed="rId8"/>
-              </a:ext>
-            </a:extLst>
-          </a:blip>
-          <a:stretch>
-            <a:fillRect/>
-          </a:stretch>
-        </p:blipFill>
-        <p:spPr>
-          <a:xfrm>
-            <a:off x="1170432" y="2213580"/>
-            <a:ext cx="327721" cy="327721"/>
-          </a:xfrm>
-          <a:prstGeom prst="rect">
-            <a:avLst/>
-          </a:prstGeom>
-        </p:spPr>
-      </p:pic>
-      <p:sp>
-        <p:nvSpPr>
-          <p:cNvPr id="21" name="Text 15"/>
+          <p:cNvPr id="11" name="Text 9"/>
           <p:cNvSpPr txBox="1"/>
           <p:nvPr/>
         </p:nvSpPr>
         <p:spPr>
           <a:xfrm>
-            <a:off x="1699321" y="1957548"/>
-            <a:ext cx="9255191" cy="839785"/>
+            <a:off x="896112" y="1664208"/>
+            <a:ext cx="4791456" cy="4169664"/>
           </a:xfrm>
           <a:prstGeom prst="rect">
             <a:avLst/>
@@ -22158,7 +18977,7 @@
           <a:ln/>
         </p:spPr>
         <p:txBody>
-          <a:bodyPr wrap="square" lIns="0" tIns="25400" rIns="25400" bIns="0" rtlCol="0" anchor="ctr"/>
+          <a:bodyPr wrap="square" lIns="0" tIns="25400" rIns="25400" bIns="0" rtlCol="0" anchor="t"/>
           <a:lstStyle/>
           <a:p>
             <a:pPr algn="l" indent="0" marL="0">
@@ -22176,7 +18995,7 @@
                 <a:ea typeface="Pretendard" pitchFamily="34" charset="-122"/>
                 <a:cs typeface="Pretendard" pitchFamily="34" charset="-120"/>
               </a:rPr>
-              <a:t>Integrations</a:t>
+              <a:t>- Integrations</a:t>
             </a:r>
             <a:pPr algn="l" indent="0" marL="0">
               <a:lnSpc>
@@ -22201,71 +19020,14 @@
       </p:sp>
       <p:sp>
         <p:nvSpPr>
-          <p:cNvPr id="22" name="Shape 16"/>
-          <p:cNvSpPr/>
-          <p:nvPr/>
-        </p:nvSpPr>
-        <p:spPr>
-          <a:xfrm>
-            <a:off x="1097280" y="3466308"/>
-            <a:ext cx="474025" cy="474025"/>
-          </a:xfrm>
-          <a:prstGeom prst="roundRect">
-            <a:avLst>
-              <a:gd name="adj" fmla="val 7716"/>
-            </a:avLst>
-          </a:prstGeom>
-          <a:solidFill>
-            <a:srgbClr val="F8F4EF"/>
-          </a:solidFill>
-          <a:ln w="12700">
-            <a:solidFill>
-              <a:srgbClr val="C6CCC9"/>
-            </a:solidFill>
-            <a:prstDash val="solid"/>
-          </a:ln>
-        </p:spPr>
-      </p:sp>
-      <p:pic>
-        <p:nvPicPr>
-          <p:cNvPr id="23" name="Image 4" descr="spark icon from tabler-icons (MIT)">    </p:cNvPr>
-          <p:cNvPicPr>
-            <a:picLocks noChangeAspect="1"/>
-          </p:cNvPicPr>
-          <p:nvPr/>
-        </p:nvPicPr>
-        <p:blipFill>
-          <a:blip r:embed="rId9">
-            <a:extLst>
-              <a:ext uri="{96DAC541-7B7A-43D3-8B79-37D633B846F1}">
-                <asvg:svgBlip xmlns:asvg="http://schemas.microsoft.com/office/drawing/2016/SVG/main" r:embed="rId10"/>
-              </a:ext>
-            </a:extLst>
-          </a:blip>
-          <a:stretch>
-            <a:fillRect/>
-          </a:stretch>
-        </p:blipFill>
-        <p:spPr>
-          <a:xfrm>
-            <a:off x="1170432" y="3539460"/>
-            <a:ext cx="327721" cy="327721"/>
-          </a:xfrm>
-          <a:prstGeom prst="rect">
-            <a:avLst/>
-          </a:prstGeom>
-        </p:spPr>
-      </p:pic>
-      <p:sp>
-        <p:nvSpPr>
-          <p:cNvPr id="24" name="Text 17"/>
+          <p:cNvPr id="12" name="Text 10"/>
           <p:cNvSpPr txBox="1"/>
           <p:nvPr/>
         </p:nvSpPr>
         <p:spPr>
           <a:xfrm>
-            <a:off x="1699321" y="3283428"/>
-            <a:ext cx="9255191" cy="839785"/>
+            <a:off x="6473952" y="1664208"/>
+            <a:ext cx="4791456" cy="4169664"/>
           </a:xfrm>
           <a:prstGeom prst="rect">
             <a:avLst/>
@@ -22274,7 +19036,7 @@
           <a:ln/>
         </p:spPr>
         <p:txBody>
-          <a:bodyPr wrap="square" lIns="0" tIns="25400" rIns="25400" bIns="0" rtlCol="0" anchor="ctr"/>
+          <a:bodyPr wrap="square" lIns="0" tIns="25400" rIns="25400" bIns="0" rtlCol="0" anchor="t"/>
           <a:lstStyle/>
           <a:p>
             <a:pPr algn="l" indent="0" marL="0">
@@ -22292,7 +19054,7 @@
                 <a:ea typeface="Pretendard" pitchFamily="34" charset="-122"/>
                 <a:cs typeface="Pretendard" pitchFamily="34" charset="-120"/>
               </a:rPr>
-              <a:t>LangSmith</a:t>
+              <a:t>- LangSmith</a:t>
             </a:r>
             <a:pPr algn="l" indent="0" marL="0">
               <a:lnSpc>
@@ -22310,122 +19072,6 @@
                 <a:cs typeface="Pretendard" pitchFamily="34" charset="-120"/>
               </a:rPr>
               <a:t> Agent evals, observability, and debugging for LLM apps</a:t>
-            </a:r>
-            <a:endParaRPr lang="en-US" sz="2200" dirty="0"/>
-          </a:p>
-        </p:txBody>
-      </p:sp>
-      <p:sp>
-        <p:nvSpPr>
-          <p:cNvPr id="25" name="Shape 18"/>
-          <p:cNvSpPr/>
-          <p:nvPr/>
-        </p:nvSpPr>
-        <p:spPr>
-          <a:xfrm>
-            <a:off x="1097280" y="4783044"/>
-            <a:ext cx="474025" cy="474025"/>
-          </a:xfrm>
-          <a:prstGeom prst="roundRect">
-            <a:avLst>
-              <a:gd name="adj" fmla="val 7716"/>
-            </a:avLst>
-          </a:prstGeom>
-          <a:solidFill>
-            <a:srgbClr val="F8F4EF"/>
-          </a:solidFill>
-          <a:ln w="12700">
-            <a:solidFill>
-              <a:srgbClr val="C6CCC9"/>
-            </a:solidFill>
-            <a:prstDash val="solid"/>
-          </a:ln>
-        </p:spPr>
-      </p:sp>
-      <p:pic>
-        <p:nvPicPr>
-          <p:cNvPr id="26" name="Image 5" descr="flow icon from tabler-icons (MIT)">    </p:cNvPr>
-          <p:cNvPicPr>
-            <a:picLocks noChangeAspect="1"/>
-          </p:cNvPicPr>
-          <p:nvPr/>
-        </p:nvPicPr>
-        <p:blipFill>
-          <a:blip r:embed="rId11">
-            <a:extLst>
-              <a:ext uri="{96DAC541-7B7A-43D3-8B79-37D633B846F1}">
-                <asvg:svgBlip xmlns:asvg="http://schemas.microsoft.com/office/drawing/2016/SVG/main" r:embed="rId12"/>
-              </a:ext>
-            </a:extLst>
-          </a:blip>
-          <a:stretch>
-            <a:fillRect/>
-          </a:stretch>
-        </p:blipFill>
-        <p:spPr>
-          <a:xfrm>
-            <a:off x="1170432" y="4856196"/>
-            <a:ext cx="327721" cy="327721"/>
-          </a:xfrm>
-          <a:prstGeom prst="rect">
-            <a:avLst/>
-          </a:prstGeom>
-        </p:spPr>
-      </p:pic>
-      <p:sp>
-        <p:nvSpPr>
-          <p:cNvPr id="27" name="Text 19"/>
-          <p:cNvSpPr txBox="1"/>
-          <p:nvPr/>
-        </p:nvSpPr>
-        <p:spPr>
-          <a:xfrm>
-            <a:off x="1699321" y="4600164"/>
-            <a:ext cx="9255191" cy="839785"/>
-          </a:xfrm>
-          <a:prstGeom prst="rect">
-            <a:avLst/>
-          </a:prstGeom>
-          <a:noFill/>
-          <a:ln/>
-        </p:spPr>
-        <p:txBody>
-          <a:bodyPr wrap="square" lIns="0" tIns="25400" rIns="25400" bIns="0" rtlCol="0" anchor="ctr"/>
-          <a:lstStyle/>
-          <a:p>
-            <a:pPr algn="l" indent="0" marL="0">
-              <a:lnSpc>
-                <a:spcPct val="120000"/>
-              </a:lnSpc>
-              <a:buNone/>
-            </a:pPr>
-            <a:r>
-              <a:rPr lang="en-US" sz="2200" b="1" dirty="0">
-                <a:solidFill>
-                  <a:srgbClr val="0F766E"/>
-                </a:solidFill>
-                <a:latin typeface="Pretendard" pitchFamily="34" charset="0"/>
-                <a:ea typeface="Pretendard" pitchFamily="34" charset="-122"/>
-                <a:cs typeface="Pretendard" pitchFamily="34" charset="-120"/>
-              </a:rPr>
-              <a:t>LangSmith Deployment</a:t>
-            </a:r>
-            <a:pPr algn="l" indent="0" marL="0">
-              <a:lnSpc>
-                <a:spcPct val="120000"/>
-              </a:lnSpc>
-              <a:buNone/>
-            </a:pPr>
-            <a:r>
-              <a:rPr lang="en-US" sz="2200" dirty="0">
-                <a:solidFill>
-                  <a:srgbClr val="18181B"/>
-                </a:solidFill>
-                <a:latin typeface="Pretendard" pitchFamily="34" charset="0"/>
-                <a:ea typeface="Pretendard" pitchFamily="34" charset="-122"/>
-                <a:cs typeface="Pretendard" pitchFamily="34" charset="-120"/>
-              </a:rPr>
-              <a:t> Deploy and scale agents with a purpose-built platform for long-running, stateful workflows</a:t>
             </a:r>
             <a:endParaRPr lang="en-US" sz="2200" dirty="0"/>
           </a:p>

--- a/artifacts/external-markdown-visual-eval/iteration-03/build/deck.pptx
+++ b/artifacts/external-markdown-visual-eval/iteration-03/build/deck.pptx
@@ -30347,7 +30347,7 @@
                 <a:ea typeface="Pretendard" pitchFamily="34" charset="-122"/>
                 <a:cs typeface="Pretendard" pitchFamily="34" charset="-120"/>
               </a:rPr>
-              <a:t>  iteration 3 of 4.</a:t>
+              <a:t>  iteration 3 of 5.</a:t>
             </a:r>
             <a:endParaRPr lang="en-US" sz="2200" dirty="0"/>
           </a:p>
